--- a/vault/courses/picking-a-frontier-model-2026-q2/ch01-slides.pptx
+++ b/vault/courses/picking-a-frontier-model-2026-q2/ch01-slides.pptx
@@ -14,12 +14,8 @@
     <p:sldId id="262" r:id="rId13"/>
     <p:sldId id="263" r:id="rId14"/>
     <p:sldId id="264" r:id="rId15"/>
-    <p:sldId id="265" r:id="rId16"/>
-    <p:sldId id="266" r:id="rId17"/>
-    <p:sldId id="267" r:id="rId18"/>
-    <p:sldId id="268" r:id="rId19"/>
   </p:sldIdLst>
-  <p:sldSz cx="12188952" cy="6858000" type="screen4x3"/>
+  <p:sldSz cx="12191695" cy="6858000" type="screen4x3"/>
   <p:notesSz cx="6858000" cy="9144000"/>
   <p:defaultTextStyle>
     <a:defPPr>
@@ -3096,7 +3092,7 @@
     <p:bg>
       <p:bgPr>
         <a:solidFill>
-          <a:srgbClr val="0F2B46"/>
+          <a:srgbClr val="18181B"/>
         </a:solidFill>
         <a:effectLst/>
       </p:bgPr>
@@ -3116,8 +3112,8 @@
         </p:nvSpPr>
         <p:spPr>
           <a:xfrm>
-            <a:off x="548640" y="365760"/>
-            <a:ext cx="10972800" cy="457200"/>
+            <a:off x="731520" y="1005840"/>
+            <a:ext cx="10698480" cy="548640"/>
           </a:xfrm>
           <a:prstGeom prst="rect">
             <a:avLst/>
@@ -3130,14 +3126,14 @@
           </a:bodyPr>
           <a:lstStyle/>
           <a:p>
-            <a:pPr algn="l"/>
-            <a:r>
-              <a:rPr sz="1400" b="0" i="0">
-                <a:solidFill>
-                  <a:srgbClr val="009EB5"/>
+            <a:pPr algn="ctr"/>
+            <a:r>
+              <a:rPr sz="1300" b="1" i="0">
+                <a:solidFill>
+                  <a:srgbClr val="A1A1AA"/>
                 </a:solidFill>
               </a:rPr>
-              <a:t>PICKING A FRONTIER MODEL · 2026 Q2</a:t>
+              <a:t>PICKING A FRONTIER MODEL 2026 Q2</a:t>
             </a:r>
           </a:p>
         </p:txBody>
@@ -3150,8 +3146,8 @@
         </p:nvSpPr>
         <p:spPr>
           <a:xfrm>
-            <a:off x="548640" y="868680"/>
-            <a:ext cx="10972800" cy="457200"/>
+            <a:off x="731520" y="1691640"/>
+            <a:ext cx="10698480" cy="640080"/>
           </a:xfrm>
           <a:prstGeom prst="rect">
             <a:avLst/>
@@ -3164,11 +3160,11 @@
           </a:bodyPr>
           <a:lstStyle/>
           <a:p>
-            <a:pPr algn="l"/>
-            <a:r>
-              <a:rPr sz="1800" b="0" i="0">
-                <a:solidFill>
-                  <a:srgbClr val="FFFFFF"/>
+            <a:pPr algn="ctr"/>
+            <a:r>
+              <a:rPr sz="2000" b="0" i="0">
+                <a:solidFill>
+                  <a:srgbClr val="A1A1AA"/>
                 </a:solidFill>
               </a:rPr>
               <a:t>Chapter 1</a:t>
@@ -3184,8 +3180,8 @@
         </p:nvSpPr>
         <p:spPr>
           <a:xfrm>
-            <a:off x="548640" y="1371600"/>
-            <a:ext cx="10972800" cy="1828800"/>
+            <a:off x="731520" y="2468880"/>
+            <a:ext cx="10698480" cy="2286000"/>
           </a:xfrm>
           <a:prstGeom prst="rect">
             <a:avLst/>
@@ -3198,15 +3194,14 @@
           </a:bodyPr>
           <a:lstStyle/>
           <a:p>
-            <a:pPr algn="l"/>
-            <a:r>
-              <a:rPr sz="4600" b="1" i="0">
+            <a:pPr algn="ctr"/>
+            <a:r>
+              <a:rPr sz="3000" b="1" i="0">
                 <a:solidFill>
                   <a:srgbClr val="FFFFFF"/>
                 </a:solidFill>
               </a:rPr>
-              <a:t>The dimensions that matter
-— and the ones that don't</a:t>
+              <a:t>How to choose frontier model evaluation dimensions for production workloads</a:t>
             </a:r>
           </a:p>
         </p:txBody>
@@ -3219,8 +3214,8 @@
         </p:nvSpPr>
         <p:spPr>
           <a:xfrm>
-            <a:off x="548640" y="3383280"/>
-            <a:ext cx="10972800" cy="548640"/>
+            <a:off x="731520" y="6263640"/>
+            <a:ext cx="10698480" cy="365760"/>
           </a:xfrm>
           <a:prstGeom prst="rect">
             <a:avLst/>
@@ -3233,34 +3228,94 @@
           </a:bodyPr>
           <a:lstStyle/>
           <a:p>
+            <a:pPr algn="ctr"/>
+            <a:r>
+              <a:rPr sz="1000" b="0" i="0">
+                <a:solidFill>
+                  <a:srgbClr val="A1A1AA"/>
+                </a:solidFill>
+              </a:rPr>
+              <a:t>academy.kspl.tech | Koenig AI Academy</a:t>
+            </a:r>
+          </a:p>
+        </p:txBody>
+      </p:sp>
+    </p:spTree>
+  </p:cSld>
+  <p:clrMapOvr>
+    <a:masterClrMapping/>
+  </p:clrMapOvr>
+</p:sld>
+</file>
+
+<file path=ppt/slides/slide2.xml><?xml version="1.0" encoding="utf-8"?>
+<p:sld xmlns:a="http://schemas.openxmlformats.org/drawingml/2006/main" xmlns:p="http://schemas.openxmlformats.org/presentationml/2006/main" xmlns:r="http://schemas.openxmlformats.org/officeDocument/2006/relationships">
+  <p:cSld>
+    <p:bg>
+      <p:bgPr>
+        <a:solidFill>
+          <a:srgbClr val="18181B"/>
+        </a:solidFill>
+        <a:effectLst/>
+      </p:bgPr>
+    </p:bg>
+    <p:spTree>
+      <p:nvGrpSpPr>
+        <p:cNvPr id="1" name=""/>
+        <p:cNvGrpSpPr/>
+        <p:nvPr/>
+      </p:nvGrpSpPr>
+      <p:grpSpPr/>
+      <p:sp>
+        <p:nvSpPr>
+          <p:cNvPr id="2" name="TextBox 1"/>
+          <p:cNvSpPr txBox="1"/>
+          <p:nvPr/>
+        </p:nvSpPr>
+        <p:spPr>
+          <a:xfrm>
+            <a:off x="731520" y="320040"/>
+            <a:ext cx="10698480" cy="1005840"/>
+          </a:xfrm>
+          <a:prstGeom prst="rect">
+            <a:avLst/>
+          </a:prstGeom>
+          <a:noFill/>
+        </p:spPr>
+        <p:txBody>
+          <a:bodyPr wrap="square">
+            <a:spAutoFit/>
+          </a:bodyPr>
+          <a:lstStyle/>
+          <a:p>
             <a:pPr algn="l"/>
             <a:r>
-              <a:rPr sz="2000" b="0" i="1">
-                <a:solidFill>
-                  <a:srgbClr val="009EB5"/>
+              <a:rPr sz="2800" b="1" i="0">
+                <a:solidFill>
+                  <a:srgbClr val="FFFFFF"/>
                 </a:solidFill>
               </a:rPr>
-              <a:t>5 production metrics that predict real outcomes  ·  3 benchmarks to deprioritize</a:t>
-            </a:r>
-          </a:p>
-        </p:txBody>
-      </p:sp>
-      <p:sp>
-        <p:nvSpPr>
-          <p:cNvPr id="6" name="Rectangle 5"/>
+              <a:t>What you'll be able to do</a:t>
+            </a:r>
+          </a:p>
+        </p:txBody>
+      </p:sp>
+      <p:sp>
+        <p:nvSpPr>
+          <p:cNvPr id="3" name="Rectangle 2"/>
           <p:cNvSpPr/>
           <p:nvPr/>
         </p:nvSpPr>
         <p:spPr>
           <a:xfrm>
-            <a:off x="0" y="6309360"/>
-            <a:ext cx="12188952" cy="548640"/>
+            <a:off x="731520" y="1417320"/>
+            <a:ext cx="10698480" cy="36576"/>
           </a:xfrm>
           <a:prstGeom prst="rect">
             <a:avLst/>
           </a:prstGeom>
           <a:solidFill>
-            <a:srgbClr val="009EB5"/>
+            <a:srgbClr val="A1A1AA"/>
           </a:solidFill>
           <a:ln>
             <a:noFill/>
@@ -3290,14 +3345,116 @@
       </p:sp>
       <p:sp>
         <p:nvSpPr>
+          <p:cNvPr id="4" name="TextBox 3"/>
+          <p:cNvSpPr txBox="1"/>
+          <p:nvPr/>
+        </p:nvSpPr>
+        <p:spPr>
+          <a:xfrm>
+            <a:off x="731520" y="1600200"/>
+            <a:ext cx="10698480" cy="914400"/>
+          </a:xfrm>
+          <a:prstGeom prst="rect">
+            <a:avLst/>
+          </a:prstGeom>
+          <a:noFill/>
+        </p:spPr>
+        <p:txBody>
+          <a:bodyPr wrap="square">
+            <a:spAutoFit/>
+          </a:bodyPr>
+          <a:lstStyle/>
+          <a:p>
+            <a:pPr algn="l"/>
+            <a:r>
+              <a:rPr sz="1600" b="0" i="0">
+                <a:solidFill>
+                  <a:srgbClr val="FFFFFF"/>
+                </a:solidFill>
+              </a:rPr>
+              <a:t>▸  Identify the 5 evaluation dimensions that consistently separate frontier models on real production workloads</a:t>
+            </a:r>
+          </a:p>
+        </p:txBody>
+      </p:sp>
+      <p:sp>
+        <p:nvSpPr>
+          <p:cNvPr id="5" name="TextBox 4"/>
+          <p:cNvSpPr txBox="1"/>
+          <p:nvPr/>
+        </p:nvSpPr>
+        <p:spPr>
+          <a:xfrm>
+            <a:off x="731520" y="2468880"/>
+            <a:ext cx="10698480" cy="914400"/>
+          </a:xfrm>
+          <a:prstGeom prst="rect">
+            <a:avLst/>
+          </a:prstGeom>
+          <a:noFill/>
+        </p:spPr>
+        <p:txBody>
+          <a:bodyPr wrap="square">
+            <a:spAutoFit/>
+          </a:bodyPr>
+          <a:lstStyle/>
+          <a:p>
+            <a:pPr algn="l"/>
+            <a:r>
+              <a:rPr sz="1600" b="0" i="0">
+                <a:solidFill>
+                  <a:srgbClr val="FFFFFF"/>
+                </a:solidFill>
+              </a:rPr>
+              <a:t>▸  Name 3 commonly cited benchmarks that correlate poorly with production outcomes and explain the gap</a:t>
+            </a:r>
+          </a:p>
+        </p:txBody>
+      </p:sp>
+      <p:sp>
+        <p:nvSpPr>
+          <p:cNvPr id="6" name="TextBox 5"/>
+          <p:cNvSpPr txBox="1"/>
+          <p:nvPr/>
+        </p:nvSpPr>
+        <p:spPr>
+          <a:xfrm>
+            <a:off x="731520" y="3337560"/>
+            <a:ext cx="10698480" cy="914400"/>
+          </a:xfrm>
+          <a:prstGeom prst="rect">
+            <a:avLst/>
+          </a:prstGeom>
+          <a:noFill/>
+        </p:spPr>
+        <p:txBody>
+          <a:bodyPr wrap="square">
+            <a:spAutoFit/>
+          </a:bodyPr>
+          <a:lstStyle/>
+          <a:p>
+            <a:pPr algn="l"/>
+            <a:r>
+              <a:rPr sz="1600" b="0" i="0">
+                <a:solidFill>
+                  <a:srgbClr val="FFFFFF"/>
+                </a:solidFill>
+              </a:rPr>
+              <a:t>▸  Build a custom scorecard template scoped to a specific use case</a:t>
+            </a:r>
+          </a:p>
+        </p:txBody>
+      </p:sp>
+      <p:sp>
+        <p:nvSpPr>
           <p:cNvPr id="7" name="TextBox 6"/>
           <p:cNvSpPr txBox="1"/>
           <p:nvPr/>
         </p:nvSpPr>
         <p:spPr>
           <a:xfrm>
-            <a:off x="457200" y="6355080"/>
-            <a:ext cx="10972800" cy="365760"/>
+            <a:off x="731520" y="4206240"/>
+            <a:ext cx="10698480" cy="914400"/>
           </a:xfrm>
           <a:prstGeom prst="rect">
             <a:avLst/>
@@ -3312,12 +3469,46 @@
           <a:p>
             <a:pPr algn="l"/>
             <a:r>
-              <a:rPr sz="1300" b="0" i="0">
-                <a:solidFill>
-                  <a:srgbClr val="0F2B46"/>
+              <a:rPr sz="1600" b="0" i="0">
+                <a:solidFill>
+                  <a:srgbClr val="FFFFFF"/>
                 </a:solidFill>
               </a:rPr>
-              <a:t>Koenig AI Academy  ·  academy.kspl.tech</a:t>
+              <a:t>▸  Distinguish 'frontier model' from 'best model for your use case'</a:t>
+            </a:r>
+          </a:p>
+        </p:txBody>
+      </p:sp>
+      <p:sp>
+        <p:nvSpPr>
+          <p:cNvPr id="8" name="TextBox 7"/>
+          <p:cNvSpPr txBox="1"/>
+          <p:nvPr/>
+        </p:nvSpPr>
+        <p:spPr>
+          <a:xfrm>
+            <a:off x="731520" y="6309360"/>
+            <a:ext cx="10698480" cy="365760"/>
+          </a:xfrm>
+          <a:prstGeom prst="rect">
+            <a:avLst/>
+          </a:prstGeom>
+          <a:noFill/>
+        </p:spPr>
+        <p:txBody>
+          <a:bodyPr wrap="square">
+            <a:spAutoFit/>
+          </a:bodyPr>
+          <a:lstStyle/>
+          <a:p>
+            <a:pPr algn="l"/>
+            <a:r>
+              <a:rPr sz="1000" b="0" i="0">
+                <a:solidFill>
+                  <a:srgbClr val="A1A1AA"/>
+                </a:solidFill>
+              </a:rPr>
+              <a:t>academy.kspl.tech | Koenig AI Academy</a:t>
             </a:r>
           </a:p>
         </p:txBody>
@@ -3330,13 +3521,13 @@
 </p:sld>
 </file>
 
-<file path=ppt/slides/slide10.xml><?xml version="1.0" encoding="utf-8"?>
+<file path=ppt/slides/slide3.xml><?xml version="1.0" encoding="utf-8"?>
 <p:sld xmlns:a="http://schemas.openxmlformats.org/drawingml/2006/main" xmlns:p="http://schemas.openxmlformats.org/presentationml/2006/main" xmlns:r="http://schemas.openxmlformats.org/officeDocument/2006/relationships">
   <p:cSld>
     <p:bg>
       <p:bgPr>
         <a:solidFill>
-          <a:srgbClr val="0F2B46"/>
+          <a:srgbClr val="18181B"/>
         </a:solidFill>
         <a:effectLst/>
       </p:bgPr>
@@ -3356,8 +3547,8 @@
         </p:nvSpPr>
         <p:spPr>
           <a:xfrm>
-            <a:off x="548640" y="320040"/>
-            <a:ext cx="11064240" cy="731520"/>
+            <a:off x="731520" y="320040"/>
+            <a:ext cx="10698480" cy="1005840"/>
           </a:xfrm>
           <a:prstGeom prst="rect">
             <a:avLst/>
@@ -3372,12 +3563,12 @@
           <a:p>
             <a:pPr algn="l"/>
             <a:r>
-              <a:rPr sz="3400" b="1" i="0">
-                <a:solidFill>
-                  <a:srgbClr val="009EB5"/>
+              <a:rPr sz="2600" b="1" i="0">
+                <a:solidFill>
+                  <a:srgbClr val="FFFFFF"/>
                 </a:solidFill>
               </a:rPr>
-              <a:t>Dimension 5: Cost-per-task (not cost-per-token)</a:t>
+              <a:t>Key facts</a:t>
             </a:r>
           </a:p>
         </p:txBody>
@@ -3390,14 +3581,14 @@
         </p:nvSpPr>
         <p:spPr>
           <a:xfrm>
-            <a:off x="548640" y="1097280"/>
-            <a:ext cx="11064240" cy="27432"/>
+            <a:off x="731520" y="1417320"/>
+            <a:ext cx="10698480" cy="36576"/>
           </a:xfrm>
           <a:prstGeom prst="rect">
             <a:avLst/>
           </a:prstGeom>
           <a:solidFill>
-            <a:srgbClr val="009EB5"/>
+            <a:srgbClr val="A1A1AA"/>
           </a:solidFill>
           <a:ln>
             <a:noFill/>
@@ -3433,8 +3624,8 @@
         </p:nvSpPr>
         <p:spPr>
           <a:xfrm>
-            <a:off x="777240" y="1280160"/>
-            <a:ext cx="10607040" cy="548640"/>
+            <a:off x="731520" y="1600200"/>
+            <a:ext cx="10698480" cy="914400"/>
           </a:xfrm>
           <a:prstGeom prst="rect">
             <a:avLst/>
@@ -3447,13 +3638,14 @@
           </a:bodyPr>
           <a:lstStyle/>
           <a:p>
-            <a:r>
-              <a:rPr sz="2000">
+            <a:pPr algn="l"/>
+            <a:r>
+              <a:rPr sz="1600" b="0" i="0">
                 <a:solidFill>
                   <a:srgbClr val="FFFFFF"/>
                 </a:solidFill>
               </a:rPr>
-              <a:t>▸  True cost = token cost × retries + caching savings + tool-call overhead</a:t>
+              <a:t>▸  MMLU, HumanEval, and GPQA — the three benchmarks most commonly cited in model release notes — measure knowledge recall, </a:t>
             </a:r>
           </a:p>
         </p:txBody>
@@ -3466,8 +3658,8 @@
         </p:nvSpPr>
         <p:spPr>
           <a:xfrm>
-            <a:off x="777240" y="1847088"/>
-            <a:ext cx="10607040" cy="548640"/>
+            <a:off x="731520" y="2468880"/>
+            <a:ext cx="10698480" cy="914400"/>
           </a:xfrm>
           <a:prstGeom prst="rect">
             <a:avLst/>
@@ -3480,13 +3672,14 @@
           </a:bodyPr>
           <a:lstStyle/>
           <a:p>
-            <a:r>
-              <a:rPr sz="2000">
+            <a:pPr algn="l"/>
+            <a:r>
+              <a:rPr sz="1600" b="0" i="0">
                 <a:solidFill>
                   <a:srgbClr val="FFFFFF"/>
                 </a:solidFill>
               </a:rPr>
-              <a:t>▸  A 'cheaper' model with 15% retry rate can cost more per task than a reliable one</a:t>
+              <a:t>▸  As of Q2 2026, no major public benchmark measures tool-use determinism — the probability that the same prompt produces s</a:t>
             </a:r>
           </a:p>
         </p:txBody>
@@ -3499,8 +3692,8 @@
         </p:nvSpPr>
         <p:spPr>
           <a:xfrm>
-            <a:off x="777240" y="2414016"/>
-            <a:ext cx="10607040" cy="548640"/>
+            <a:off x="731520" y="3337560"/>
+            <a:ext cx="10698480" cy="914400"/>
           </a:xfrm>
           <a:prstGeom prst="rect">
             <a:avLst/>
@@ -3513,13 +3706,14 @@
           </a:bodyPr>
           <a:lstStyle/>
           <a:p>
-            <a:r>
-              <a:rPr sz="2000">
+            <a:pPr algn="l"/>
+            <a:r>
+              <a:rPr sz="1600" b="0" i="0">
                 <a:solidFill>
                   <a:srgbClr val="FFFFFF"/>
                 </a:solidFill>
               </a:rPr>
-              <a:t>▸  Prompt caching economics differ significantly across providers</a:t>
+              <a:t>▸  Opus 4.7's published context window is 1M tokens ; Gemini 3.1 Pro's is 1M tokens . Empirically measured retrieval accura</a:t>
             </a:r>
           </a:p>
         </p:txBody>
@@ -3532,8 +3726,8 @@
         </p:nvSpPr>
         <p:spPr>
           <a:xfrm>
-            <a:off x="777240" y="2980944"/>
-            <a:ext cx="10607040" cy="548640"/>
+            <a:off x="731520" y="6309360"/>
+            <a:ext cx="10698480" cy="365760"/>
           </a:xfrm>
           <a:prstGeom prst="rect">
             <a:avLst/>
@@ -3546,46 +3740,14 @@
           </a:bodyPr>
           <a:lstStyle/>
           <a:p>
-            <a:r>
-              <a:rPr sz="2000">
-                <a:solidFill>
-                  <a:srgbClr val="FFFFFF"/>
+            <a:pPr algn="l"/>
+            <a:r>
+              <a:rPr sz="1000" b="0" i="0">
+                <a:solidFill>
+                  <a:srgbClr val="A1A1AA"/>
                 </a:solidFill>
               </a:rPr>
-              <a:t>▸  Anthropic: 1,024+ token boundary, 5-min TTL  ·  OpenAI: 128+ token boundary</a:t>
-            </a:r>
-          </a:p>
-        </p:txBody>
-      </p:sp>
-      <p:sp>
-        <p:nvSpPr>
-          <p:cNvPr id="8" name="TextBox 7"/>
-          <p:cNvSpPr txBox="1"/>
-          <p:nvPr/>
-        </p:nvSpPr>
-        <p:spPr>
-          <a:xfrm>
-            <a:off x="777240" y="3547872"/>
-            <a:ext cx="10607040" cy="548640"/>
-          </a:xfrm>
-          <a:prstGeom prst="rect">
-            <a:avLst/>
-          </a:prstGeom>
-          <a:noFill/>
-        </p:spPr>
-        <p:txBody>
-          <a:bodyPr wrap="square">
-            <a:spAutoFit/>
-          </a:bodyPr>
-          <a:lstStyle/>
-          <a:p>
-            <a:r>
-              <a:rPr sz="2000">
-                <a:solidFill>
-                  <a:srgbClr val="FFFFFF"/>
-                </a:solidFill>
-              </a:rPr>
-              <a:t>▸  Chapter 4 quantifies cost-per-task across all three models</a:t>
+              <a:t>academy.kspl.tech | Koenig AI Academy</a:t>
             </a:r>
           </a:p>
         </p:txBody>
@@ -3598,13 +3760,13 @@
 </p:sld>
 </file>
 
-<file path=ppt/slides/slide11.xml><?xml version="1.0" encoding="utf-8"?>
+<file path=ppt/slides/slide4.xml><?xml version="1.0" encoding="utf-8"?>
 <p:sld xmlns:a="http://schemas.openxmlformats.org/drawingml/2006/main" xmlns:p="http://schemas.openxmlformats.org/presentationml/2006/main" xmlns:r="http://schemas.openxmlformats.org/officeDocument/2006/relationships">
   <p:cSld>
     <p:bg>
       <p:bgPr>
         <a:solidFill>
-          <a:srgbClr val="F4F6F8"/>
+          <a:srgbClr val="18181B"/>
         </a:solidFill>
         <a:effectLst/>
       </p:bgPr>
@@ -3624,8 +3786,8 @@
         </p:nvSpPr>
         <p:spPr>
           <a:xfrm>
-            <a:off x="548640" y="320040"/>
-            <a:ext cx="11064240" cy="731520"/>
+            <a:off x="731520" y="320040"/>
+            <a:ext cx="10698480" cy="1005840"/>
           </a:xfrm>
           <a:prstGeom prst="rect">
             <a:avLst/>
@@ -3640,12 +3802,12 @@
           <a:p>
             <a:pPr algn="l"/>
             <a:r>
-              <a:rPr sz="3400" b="1" i="0">
-                <a:solidFill>
-                  <a:srgbClr val="0F2B46"/>
+              <a:rPr sz="2600" b="1" i="0">
+                <a:solidFill>
+                  <a:srgbClr val="FFFFFF"/>
                 </a:solidFill>
               </a:rPr>
-              <a:t>Use-case archetypes</a:t>
+              <a:t>Why the standard benchmarks fail builders</a:t>
             </a:r>
           </a:p>
         </p:txBody>
@@ -3658,14 +3820,14 @@
         </p:nvSpPr>
         <p:spPr>
           <a:xfrm>
-            <a:off x="548640" y="1097280"/>
-            <a:ext cx="11064240" cy="27432"/>
+            <a:off x="731520" y="1417320"/>
+            <a:ext cx="10698480" cy="36576"/>
           </a:xfrm>
           <a:prstGeom prst="rect">
             <a:avLst/>
           </a:prstGeom>
           <a:solidFill>
-            <a:srgbClr val="009EB5"/>
+            <a:srgbClr val="A1A1AA"/>
           </a:solidFill>
           <a:ln>
             <a:noFill/>
@@ -3701,8 +3863,8 @@
         </p:nvSpPr>
         <p:spPr>
           <a:xfrm>
-            <a:off x="548640" y="1188720"/>
-            <a:ext cx="2377440" cy="365760"/>
+            <a:off x="731520" y="1600200"/>
+            <a:ext cx="10698480" cy="914400"/>
           </a:xfrm>
           <a:prstGeom prst="rect">
             <a:avLst/>
@@ -3717,12 +3879,12 @@
           <a:p>
             <a:pPr algn="l"/>
             <a:r>
-              <a:rPr sz="1500" b="1" i="0">
-                <a:solidFill>
-                  <a:srgbClr val="0F2B46"/>
+              <a:rPr sz="1600" b="0" i="0">
+                <a:solidFill>
+                  <a:srgbClr val="FFFFFF"/>
                 </a:solidFill>
               </a:rPr>
-              <a:t>Archetype</a:t>
+              <a:t>▸  Every model release in 2026 ships with a table comparing MMLU, HumanEval, GPQA, and MATH scores. These benchmarks are no</a:t>
             </a:r>
           </a:p>
         </p:txBody>
@@ -3735,8 +3897,8 @@
         </p:nvSpPr>
         <p:spPr>
           <a:xfrm>
-            <a:off x="3017520" y="1188720"/>
-            <a:ext cx="2743200" cy="365760"/>
+            <a:off x="731520" y="2468880"/>
+            <a:ext cx="10698480" cy="914400"/>
           </a:xfrm>
           <a:prstGeom prst="rect">
             <a:avLst/>
@@ -3751,12 +3913,12 @@
           <a:p>
             <a:pPr algn="l"/>
             <a:r>
-              <a:rPr sz="1500" b="1" i="0">
-                <a:solidFill>
-                  <a:srgbClr val="0F2B46"/>
+              <a:rPr sz="1600" b="0" i="0">
+                <a:solidFill>
+                  <a:srgbClr val="FFFFFF"/>
                 </a:solidFill>
               </a:rPr>
-              <a:t>Top dimension</a:t>
+              <a:t>▸  Consider MMLU (Massive Multitask Language Understanding). It evaluates knowledge recall across 57 academic subjects via </a:t>
             </a:r>
           </a:p>
         </p:txBody>
@@ -3769,8 +3931,8 @@
         </p:nvSpPr>
         <p:spPr>
           <a:xfrm>
-            <a:off x="5852160" y="1188720"/>
-            <a:ext cx="2743200" cy="365760"/>
+            <a:off x="731520" y="3337560"/>
+            <a:ext cx="10698480" cy="914400"/>
           </a:xfrm>
           <a:prstGeom prst="rect">
             <a:avLst/>
@@ -3785,12 +3947,12 @@
           <a:p>
             <a:pPr algn="l"/>
             <a:r>
-              <a:rPr sz="1500" b="1" i="0">
-                <a:solidFill>
-                  <a:srgbClr val="0F2B46"/>
+              <a:rPr sz="1600" b="0" i="0">
+                <a:solidFill>
+                  <a:srgbClr val="FFFFFF"/>
                 </a:solidFill>
               </a:rPr>
-              <a:t>Second dimension</a:t>
+              <a:t>▸  HumanEval is more practically relevant — it measures code generation on isolated function-completion tasks. But it measu</a:t>
             </a:r>
           </a:p>
         </p:txBody>
@@ -3803,8 +3965,8 @@
         </p:nvSpPr>
         <p:spPr>
           <a:xfrm>
-            <a:off x="8686800" y="1188720"/>
-            <a:ext cx="3291840" cy="365760"/>
+            <a:off x="731520" y="6309360"/>
+            <a:ext cx="10698480" cy="365760"/>
           </a:xfrm>
           <a:prstGeom prst="rect">
             <a:avLst/>
@@ -3819,37 +3981,95 @@
           <a:p>
             <a:pPr algn="l"/>
             <a:r>
-              <a:rPr sz="1500" b="1" i="0">
-                <a:solidFill>
-                  <a:srgbClr val="0F2B46"/>
+              <a:rPr sz="1000" b="0" i="0">
+                <a:solidFill>
+                  <a:srgbClr val="A1A1AA"/>
                 </a:solidFill>
               </a:rPr>
-              <a:t>Disqualifier</a:t>
-            </a:r>
-          </a:p>
-        </p:txBody>
-      </p:sp>
-      <p:sp>
-        <p:nvSpPr>
-          <p:cNvPr id="8" name="Rectangle 7"/>
+              <a:t>academy.kspl.tech | Koenig AI Academy</a:t>
+            </a:r>
+          </a:p>
+        </p:txBody>
+      </p:sp>
+    </p:spTree>
+  </p:cSld>
+  <p:clrMapOvr>
+    <a:masterClrMapping/>
+  </p:clrMapOvr>
+</p:sld>
+</file>
+
+<file path=ppt/slides/slide5.xml><?xml version="1.0" encoding="utf-8"?>
+<p:sld xmlns:a="http://schemas.openxmlformats.org/drawingml/2006/main" xmlns:p="http://schemas.openxmlformats.org/presentationml/2006/main" xmlns:r="http://schemas.openxmlformats.org/officeDocument/2006/relationships">
+  <p:cSld>
+    <p:bg>
+      <p:bgPr>
+        <a:solidFill>
+          <a:srgbClr val="18181B"/>
+        </a:solidFill>
+        <a:effectLst/>
+      </p:bgPr>
+    </p:bg>
+    <p:spTree>
+      <p:nvGrpSpPr>
+        <p:cNvPr id="1" name=""/>
+        <p:cNvGrpSpPr/>
+        <p:nvPr/>
+      </p:nvGrpSpPr>
+      <p:grpSpPr/>
+      <p:sp>
+        <p:nvSpPr>
+          <p:cNvPr id="2" name="TextBox 1"/>
+          <p:cNvSpPr txBox="1"/>
+          <p:nvPr/>
+        </p:nvSpPr>
+        <p:spPr>
+          <a:xfrm>
+            <a:off x="731520" y="320040"/>
+            <a:ext cx="10698480" cy="1005840"/>
+          </a:xfrm>
+          <a:prstGeom prst="rect">
+            <a:avLst/>
+          </a:prstGeom>
+          <a:noFill/>
+        </p:spPr>
+        <p:txBody>
+          <a:bodyPr wrap="square">
+            <a:spAutoFit/>
+          </a:bodyPr>
+          <a:lstStyle/>
+          <a:p>
+            <a:pPr algn="l"/>
+            <a:r>
+              <a:rPr sz="2600" b="1" i="0">
+                <a:solidFill>
+                  <a:srgbClr val="FFFFFF"/>
+                </a:solidFill>
+              </a:rPr>
+              <a:t>The 5 dimensions that predict production success</a:t>
+            </a:r>
+          </a:p>
+        </p:txBody>
+      </p:sp>
+      <p:sp>
+        <p:nvSpPr>
+          <p:cNvPr id="3" name="Rectangle 2"/>
           <p:cNvSpPr/>
           <p:nvPr/>
         </p:nvSpPr>
         <p:spPr>
           <a:xfrm>
-            <a:off x="502920" y="1691640"/>
-            <a:ext cx="11155680" cy="1188720"/>
+            <a:off x="731520" y="1417320"/>
+            <a:ext cx="10698480" cy="36576"/>
           </a:xfrm>
           <a:prstGeom prst="rect">
             <a:avLst/>
           </a:prstGeom>
           <a:solidFill>
-            <a:srgbClr val="E2F3F7"/>
+            <a:srgbClr val="A1A1AA"/>
           </a:solidFill>
           <a:ln>
-            <a:solidFill>
-              <a:srgbClr val="009EB5"/>
-            </a:solidFill>
+            <a:noFill/>
           </a:ln>
         </p:spPr>
         <p:style>
@@ -3876,14 +4096,184 @@
       </p:sp>
       <p:sp>
         <p:nvSpPr>
+          <p:cNvPr id="4" name="TextBox 3"/>
+          <p:cNvSpPr txBox="1"/>
+          <p:nvPr/>
+        </p:nvSpPr>
+        <p:spPr>
+          <a:xfrm>
+            <a:off x="731520" y="1600200"/>
+            <a:ext cx="10698480" cy="914400"/>
+          </a:xfrm>
+          <a:prstGeom prst="rect">
+            <a:avLst/>
+          </a:prstGeom>
+          <a:noFill/>
+        </p:spPr>
+        <p:txBody>
+          <a:bodyPr wrap="square">
+            <a:spAutoFit/>
+          </a:bodyPr>
+          <a:lstStyle/>
+          <a:p>
+            <a:pPr algn="l"/>
+            <a:r>
+              <a:rPr sz="1600" b="0" i="0">
+                <a:solidFill>
+                  <a:srgbClr val="FFFFFF"/>
+                </a:solidFill>
+              </a:rPr>
+              <a:t>▸  Based on our internal benchmark data across 12 months of production AI workloads, these are the five dimensions that con</a:t>
+            </a:r>
+          </a:p>
+        </p:txBody>
+      </p:sp>
+      <p:sp>
+        <p:nvSpPr>
+          <p:cNvPr id="5" name="TextBox 4"/>
+          <p:cNvSpPr txBox="1"/>
+          <p:nvPr/>
+        </p:nvSpPr>
+        <p:spPr>
+          <a:xfrm>
+            <a:off x="731520" y="2468880"/>
+            <a:ext cx="10698480" cy="914400"/>
+          </a:xfrm>
+          <a:prstGeom prst="rect">
+            <a:avLst/>
+          </a:prstGeom>
+          <a:noFill/>
+        </p:spPr>
+        <p:txBody>
+          <a:bodyPr wrap="square">
+            <a:spAutoFit/>
+          </a:bodyPr>
+          <a:lstStyle/>
+          <a:p>
+            <a:pPr algn="l"/>
+            <a:r>
+              <a:rPr sz="1600" b="0" i="0">
+                <a:solidFill>
+                  <a:srgbClr val="FFFFFF"/>
+                </a:solidFill>
+              </a:rPr>
+              <a:t>▸  Tool-use determinism</a:t>
+            </a:r>
+          </a:p>
+        </p:txBody>
+      </p:sp>
+      <p:sp>
+        <p:nvSpPr>
+          <p:cNvPr id="6" name="TextBox 5"/>
+          <p:cNvSpPr txBox="1"/>
+          <p:nvPr/>
+        </p:nvSpPr>
+        <p:spPr>
+          <a:xfrm>
+            <a:off x="731520" y="3337560"/>
+            <a:ext cx="10698480" cy="914400"/>
+          </a:xfrm>
+          <a:prstGeom prst="rect">
+            <a:avLst/>
+          </a:prstGeom>
+          <a:noFill/>
+        </p:spPr>
+        <p:txBody>
+          <a:bodyPr wrap="square">
+            <a:spAutoFit/>
+          </a:bodyPr>
+          <a:lstStyle/>
+          <a:p>
+            <a:pPr algn="l"/>
+            <a:r>
+              <a:rPr sz="1600" b="0" i="0">
+                <a:solidFill>
+                  <a:srgbClr val="FFFFFF"/>
+                </a:solidFill>
+              </a:rPr>
+              <a:t>▸  Context fidelity at depth</a:t>
+            </a:r>
+          </a:p>
+        </p:txBody>
+      </p:sp>
+      <p:sp>
+        <p:nvSpPr>
+          <p:cNvPr id="7" name="TextBox 6"/>
+          <p:cNvSpPr txBox="1"/>
+          <p:nvPr/>
+        </p:nvSpPr>
+        <p:spPr>
+          <a:xfrm>
+            <a:off x="731520" y="4206240"/>
+            <a:ext cx="10698480" cy="914400"/>
+          </a:xfrm>
+          <a:prstGeom prst="rect">
+            <a:avLst/>
+          </a:prstGeom>
+          <a:noFill/>
+        </p:spPr>
+        <p:txBody>
+          <a:bodyPr wrap="square">
+            <a:spAutoFit/>
+          </a:bodyPr>
+          <a:lstStyle/>
+          <a:p>
+            <a:pPr algn="l"/>
+            <a:r>
+              <a:rPr sz="1600" b="0" i="0">
+                <a:solidFill>
+                  <a:srgbClr val="FFFFFF"/>
+                </a:solidFill>
+              </a:rPr>
+              <a:t>▸  Structured-output reliability</a:t>
+            </a:r>
+          </a:p>
+        </p:txBody>
+      </p:sp>
+      <p:sp>
+        <p:nvSpPr>
+          <p:cNvPr id="8" name="TextBox 7"/>
+          <p:cNvSpPr txBox="1"/>
+          <p:nvPr/>
+        </p:nvSpPr>
+        <p:spPr>
+          <a:xfrm>
+            <a:off x="731520" y="5074920"/>
+            <a:ext cx="10698480" cy="914400"/>
+          </a:xfrm>
+          <a:prstGeom prst="rect">
+            <a:avLst/>
+          </a:prstGeom>
+          <a:noFill/>
+        </p:spPr>
+        <p:txBody>
+          <a:bodyPr wrap="square">
+            <a:spAutoFit/>
+          </a:bodyPr>
+          <a:lstStyle/>
+          <a:p>
+            <a:pPr algn="l"/>
+            <a:r>
+              <a:rPr sz="1600" b="0" i="0">
+                <a:solidFill>
+                  <a:srgbClr val="FFFFFF"/>
+                </a:solidFill>
+              </a:rPr>
+              <a:t>▸  Latency at your percentile</a:t>
+            </a:r>
+          </a:p>
+        </p:txBody>
+      </p:sp>
+      <p:sp>
+        <p:nvSpPr>
           <p:cNvPr id="9" name="TextBox 8"/>
           <p:cNvSpPr txBox="1"/>
           <p:nvPr/>
         </p:nvSpPr>
         <p:spPr>
           <a:xfrm>
-            <a:off x="594360" y="1920240"/>
-            <a:ext cx="2377440" cy="822960"/>
+            <a:off x="731520" y="6309360"/>
+            <a:ext cx="10698480" cy="365760"/>
           </a:xfrm>
           <a:prstGeom prst="rect">
             <a:avLst/>
@@ -3898,27 +4288,52 @@
           <a:p>
             <a:pPr algn="l"/>
             <a:r>
-              <a:rPr sz="1600" b="0" i="0">
-                <a:solidFill>
-                  <a:srgbClr val="333333"/>
+              <a:rPr sz="1000" b="0" i="0">
+                <a:solidFill>
+                  <a:srgbClr val="A1A1AA"/>
                 </a:solidFill>
               </a:rPr>
-              <a:t>Coding agent
-(multi-step, tool-heavy)</a:t>
-            </a:r>
-          </a:p>
-        </p:txBody>
-      </p:sp>
-      <p:sp>
-        <p:nvSpPr>
-          <p:cNvPr id="10" name="TextBox 9"/>
+              <a:t>academy.kspl.tech | Koenig AI Academy</a:t>
+            </a:r>
+          </a:p>
+        </p:txBody>
+      </p:sp>
+    </p:spTree>
+  </p:cSld>
+  <p:clrMapOvr>
+    <a:masterClrMapping/>
+  </p:clrMapOvr>
+</p:sld>
+</file>
+
+<file path=ppt/slides/slide6.xml><?xml version="1.0" encoding="utf-8"?>
+<p:sld xmlns:a="http://schemas.openxmlformats.org/drawingml/2006/main" xmlns:p="http://schemas.openxmlformats.org/presentationml/2006/main" xmlns:r="http://schemas.openxmlformats.org/officeDocument/2006/relationships">
+  <p:cSld>
+    <p:bg>
+      <p:bgPr>
+        <a:solidFill>
+          <a:srgbClr val="18181B"/>
+        </a:solidFill>
+        <a:effectLst/>
+      </p:bgPr>
+    </p:bg>
+    <p:spTree>
+      <p:nvGrpSpPr>
+        <p:cNvPr id="1" name=""/>
+        <p:cNvGrpSpPr/>
+        <p:nvPr/>
+      </p:nvGrpSpPr>
+      <p:grpSpPr/>
+      <p:sp>
+        <p:nvSpPr>
+          <p:cNvPr id="2" name="TextBox 1"/>
           <p:cNvSpPr txBox="1"/>
           <p:nvPr/>
         </p:nvSpPr>
         <p:spPr>
           <a:xfrm>
-            <a:off x="3063240" y="1920240"/>
-            <a:ext cx="2743200" cy="822960"/>
+            <a:off x="731520" y="320040"/>
+            <a:ext cx="10698480" cy="1005840"/>
           </a:xfrm>
           <a:prstGeom prst="rect">
             <a:avLst/>
@@ -3933,105 +4348,35 @@
           <a:p>
             <a:pPr algn="l"/>
             <a:r>
-              <a:rPr sz="1600" b="0" i="0">
-                <a:solidFill>
-                  <a:srgbClr val="333333"/>
+              <a:rPr sz="2600" b="1" i="0">
+                <a:solidFill>
+                  <a:srgbClr val="FFFFFF"/>
                 </a:solidFill>
               </a:rPr>
-              <a:t>Tool-use determinism</a:t>
-            </a:r>
-          </a:p>
-        </p:txBody>
-      </p:sp>
-      <p:sp>
-        <p:nvSpPr>
-          <p:cNvPr id="11" name="TextBox 10"/>
-          <p:cNvSpPr txBox="1"/>
-          <p:nvPr/>
-        </p:nvSpPr>
-        <p:spPr>
-          <a:xfrm>
-            <a:off x="5897880" y="1920240"/>
-            <a:ext cx="2743200" cy="822960"/>
-          </a:xfrm>
-          <a:prstGeom prst="rect">
-            <a:avLst/>
-          </a:prstGeom>
-          <a:noFill/>
-        </p:spPr>
-        <p:txBody>
-          <a:bodyPr wrap="square">
-            <a:spAutoFit/>
-          </a:bodyPr>
-          <a:lstStyle/>
-          <a:p>
-            <a:pPr algn="l"/>
-            <a:r>
-              <a:rPr sz="1600" b="0" i="0">
-                <a:solidFill>
-                  <a:srgbClr val="333333"/>
-                </a:solidFill>
-              </a:rPr>
-              <a:t>Structured-output reliability</a:t>
-            </a:r>
-          </a:p>
-        </p:txBody>
-      </p:sp>
-      <p:sp>
-        <p:nvSpPr>
-          <p:cNvPr id="12" name="TextBox 11"/>
-          <p:cNvSpPr txBox="1"/>
-          <p:nvPr/>
-        </p:nvSpPr>
-        <p:spPr>
-          <a:xfrm>
-            <a:off x="8732520" y="1920240"/>
-            <a:ext cx="3291840" cy="822960"/>
-          </a:xfrm>
-          <a:prstGeom prst="rect">
-            <a:avLst/>
-          </a:prstGeom>
-          <a:noFill/>
-        </p:spPr>
-        <p:txBody>
-          <a:bodyPr wrap="square">
-            <a:spAutoFit/>
-          </a:bodyPr>
-          <a:lstStyle/>
-          <a:p>
-            <a:pPr algn="l"/>
-            <a:r>
-              <a:rPr sz="1600" b="0" i="0">
-                <a:solidFill>
-                  <a:srgbClr val="333333"/>
-                </a:solidFill>
-              </a:rPr>
-              <a:t>Determinism &lt; 85%</a:t>
-            </a:r>
-          </a:p>
-        </p:txBody>
-      </p:sp>
-      <p:sp>
-        <p:nvSpPr>
-          <p:cNvPr id="13" name="Rectangle 12"/>
+              <a:t>The 3 dimensions you can probably ignore</a:t>
+            </a:r>
+          </a:p>
+        </p:txBody>
+      </p:sp>
+      <p:sp>
+        <p:nvSpPr>
+          <p:cNvPr id="3" name="Rectangle 2"/>
           <p:cNvSpPr/>
           <p:nvPr/>
         </p:nvSpPr>
         <p:spPr>
           <a:xfrm>
-            <a:off x="502920" y="3017520"/>
-            <a:ext cx="11155680" cy="1188720"/>
+            <a:off x="731520" y="1417320"/>
+            <a:ext cx="10698480" cy="36576"/>
           </a:xfrm>
           <a:prstGeom prst="rect">
             <a:avLst/>
           </a:prstGeom>
           <a:solidFill>
-            <a:srgbClr val="E2F3F7"/>
+            <a:srgbClr val="A1A1AA"/>
           </a:solidFill>
           <a:ln>
-            <a:solidFill>
-              <a:srgbClr val="009EB5"/>
-            </a:solidFill>
+            <a:noFill/>
           </a:ln>
         </p:spPr>
         <p:style>
@@ -4058,14 +4403,14 @@
       </p:sp>
       <p:sp>
         <p:nvSpPr>
-          <p:cNvPr id="14" name="TextBox 13"/>
+          <p:cNvPr id="4" name="TextBox 3"/>
           <p:cNvSpPr txBox="1"/>
           <p:nvPr/>
         </p:nvSpPr>
         <p:spPr>
           <a:xfrm>
-            <a:off x="594360" y="3246120"/>
-            <a:ext cx="2377440" cy="822960"/>
+            <a:off x="731520" y="1600200"/>
+            <a:ext cx="10698480" cy="914400"/>
           </a:xfrm>
           <a:prstGeom prst="rect">
             <a:avLst/>
@@ -4082,25 +4427,24 @@
             <a:r>
               <a:rPr sz="1600" b="0" i="0">
                 <a:solidFill>
-                  <a:srgbClr val="333333"/>
+                  <a:srgbClr val="FFFFFF"/>
                 </a:solidFill>
               </a:rPr>
-              <a:t>Document Q&amp;A
-(long-context, synthesis)</a:t>
-            </a:r>
-          </a:p>
-        </p:txBody>
-      </p:sp>
-      <p:sp>
-        <p:nvSpPr>
-          <p:cNvPr id="15" name="TextBox 14"/>
+              <a:t>▸  Not everything matters equally. Here are three dimensions frequently cited in benchmark tables that correlate weakly wit</a:t>
+            </a:r>
+          </a:p>
+        </p:txBody>
+      </p:sp>
+      <p:sp>
+        <p:nvSpPr>
+          <p:cNvPr id="5" name="TextBox 4"/>
           <p:cNvSpPr txBox="1"/>
           <p:nvPr/>
         </p:nvSpPr>
         <p:spPr>
           <a:xfrm>
-            <a:off x="3063240" y="3246120"/>
-            <a:ext cx="2743200" cy="822960"/>
+            <a:off x="731520" y="2468880"/>
+            <a:ext cx="10698480" cy="914400"/>
           </a:xfrm>
           <a:prstGeom prst="rect">
             <a:avLst/>
@@ -4117,24 +4461,24 @@
             <a:r>
               <a:rPr sz="1600" b="0" i="0">
                 <a:solidFill>
-                  <a:srgbClr val="333333"/>
+                  <a:srgbClr val="FFFFFF"/>
                 </a:solidFill>
               </a:rPr>
-              <a:t>Context fidelity at depth</a:t>
-            </a:r>
-          </a:p>
-        </p:txBody>
-      </p:sp>
-      <p:sp>
-        <p:nvSpPr>
-          <p:cNvPr id="16" name="TextBox 15"/>
+              <a:t>▸  Aggregate reasoning score (MMLU, GPQA)</a:t>
+            </a:r>
+          </a:p>
+        </p:txBody>
+      </p:sp>
+      <p:sp>
+        <p:nvSpPr>
+          <p:cNvPr id="6" name="TextBox 5"/>
           <p:cNvSpPr txBox="1"/>
           <p:nvPr/>
         </p:nvSpPr>
         <p:spPr>
           <a:xfrm>
-            <a:off x="5897880" y="3246120"/>
-            <a:ext cx="2743200" cy="822960"/>
+            <a:off x="731520" y="3337560"/>
+            <a:ext cx="10698480" cy="914400"/>
           </a:xfrm>
           <a:prstGeom prst="rect">
             <a:avLst/>
@@ -4151,24 +4495,24 @@
             <a:r>
               <a:rPr sz="1600" b="0" i="0">
                 <a:solidFill>
-                  <a:srgbClr val="333333"/>
+                  <a:srgbClr val="FFFFFF"/>
                 </a:solidFill>
               </a:rPr>
-              <a:t>Cost-per-task</a:t>
-            </a:r>
-          </a:p>
-        </p:txBody>
-      </p:sp>
-      <p:sp>
-        <p:nvSpPr>
-          <p:cNvPr id="17" name="TextBox 16"/>
+              <a:t>▸  Peak performance on hard problems</a:t>
+            </a:r>
+          </a:p>
+        </p:txBody>
+      </p:sp>
+      <p:sp>
+        <p:nvSpPr>
+          <p:cNvPr id="7" name="TextBox 6"/>
           <p:cNvSpPr txBox="1"/>
           <p:nvPr/>
         </p:nvSpPr>
         <p:spPr>
           <a:xfrm>
-            <a:off x="8732520" y="3246120"/>
-            <a:ext cx="3291840" cy="822960"/>
+            <a:off x="731520" y="4206240"/>
+            <a:ext cx="10698480" cy="914400"/>
           </a:xfrm>
           <a:prstGeom prst="rect">
             <a:avLst/>
@@ -4185,35 +4529,127 @@
             <a:r>
               <a:rPr sz="1600" b="0" i="0">
                 <a:solidFill>
-                  <a:srgbClr val="333333"/>
+                  <a:srgbClr val="FFFFFF"/>
                 </a:solidFill>
               </a:rPr>
-              <a:t>Lost-needle rate &gt; 10%</a:t>
-            </a:r>
-          </a:p>
-        </p:txBody>
-      </p:sp>
-      <p:sp>
-        <p:nvSpPr>
-          <p:cNvPr id="18" name="Rectangle 17"/>
+              <a:t>▸  Multilingual performance (unless your product is multilingual)</a:t>
+            </a:r>
+          </a:p>
+        </p:txBody>
+      </p:sp>
+      <p:sp>
+        <p:nvSpPr>
+          <p:cNvPr id="8" name="TextBox 7"/>
+          <p:cNvSpPr txBox="1"/>
+          <p:nvPr/>
+        </p:nvSpPr>
+        <p:spPr>
+          <a:xfrm>
+            <a:off x="731520" y="6309360"/>
+            <a:ext cx="10698480" cy="365760"/>
+          </a:xfrm>
+          <a:prstGeom prst="rect">
+            <a:avLst/>
+          </a:prstGeom>
+          <a:noFill/>
+        </p:spPr>
+        <p:txBody>
+          <a:bodyPr wrap="square">
+            <a:spAutoFit/>
+          </a:bodyPr>
+          <a:lstStyle/>
+          <a:p>
+            <a:pPr algn="l"/>
+            <a:r>
+              <a:rPr sz="1000" b="0" i="0">
+                <a:solidFill>
+                  <a:srgbClr val="A1A1AA"/>
+                </a:solidFill>
+              </a:rPr>
+              <a:t>academy.kspl.tech | Koenig AI Academy</a:t>
+            </a:r>
+          </a:p>
+        </p:txBody>
+      </p:sp>
+    </p:spTree>
+  </p:cSld>
+  <p:clrMapOvr>
+    <a:masterClrMapping/>
+  </p:clrMapOvr>
+</p:sld>
+</file>
+
+<file path=ppt/slides/slide7.xml><?xml version="1.0" encoding="utf-8"?>
+<p:sld xmlns:a="http://schemas.openxmlformats.org/drawingml/2006/main" xmlns:p="http://schemas.openxmlformats.org/presentationml/2006/main" xmlns:r="http://schemas.openxmlformats.org/officeDocument/2006/relationships">
+  <p:cSld>
+    <p:bg>
+      <p:bgPr>
+        <a:solidFill>
+          <a:srgbClr val="18181B"/>
+        </a:solidFill>
+        <a:effectLst/>
+      </p:bgPr>
+    </p:bg>
+    <p:spTree>
+      <p:nvGrpSpPr>
+        <p:cNvPr id="1" name=""/>
+        <p:cNvGrpSpPr/>
+        <p:nvPr/>
+      </p:nvGrpSpPr>
+      <p:grpSpPr/>
+      <p:sp>
+        <p:nvSpPr>
+          <p:cNvPr id="2" name="TextBox 1"/>
+          <p:cNvSpPr txBox="1"/>
+          <p:nvPr/>
+        </p:nvSpPr>
+        <p:spPr>
+          <a:xfrm>
+            <a:off x="731520" y="320040"/>
+            <a:ext cx="10698480" cy="1005840"/>
+          </a:xfrm>
+          <a:prstGeom prst="rect">
+            <a:avLst/>
+          </a:prstGeom>
+          <a:noFill/>
+        </p:spPr>
+        <p:txBody>
+          <a:bodyPr wrap="square">
+            <a:spAutoFit/>
+          </a:bodyPr>
+          <a:lstStyle/>
+          <a:p>
+            <a:pPr algn="l"/>
+            <a:r>
+              <a:rPr sz="2600" b="1" i="0">
+                <a:solidFill>
+                  <a:srgbClr val="FFFFFF"/>
+                </a:solidFill>
+              </a:rPr>
+              <a:t>Building your scorecard</a:t>
+            </a:r>
+          </a:p>
+        </p:txBody>
+      </p:sp>
+      <p:sp>
+        <p:nvSpPr>
+          <p:cNvPr id="3" name="Rectangle 2"/>
           <p:cNvSpPr/>
           <p:nvPr/>
         </p:nvSpPr>
         <p:spPr>
           <a:xfrm>
-            <a:off x="502920" y="4343400"/>
-            <a:ext cx="11155680" cy="1188720"/>
+            <a:off x="731520" y="1417320"/>
+            <a:ext cx="10698480" cy="36576"/>
           </a:xfrm>
           <a:prstGeom prst="rect">
             <a:avLst/>
           </a:prstGeom>
           <a:solidFill>
-            <a:srgbClr val="E2F3F7"/>
+            <a:srgbClr val="A1A1AA"/>
           </a:solidFill>
           <a:ln>
-            <a:solidFill>
-              <a:srgbClr val="009EB5"/>
-            </a:solidFill>
+            <a:noFill/>
           </a:ln>
         </p:spPr>
         <p:style>
@@ -4240,14 +4676,14 @@
       </p:sp>
       <p:sp>
         <p:nvSpPr>
-          <p:cNvPr id="19" name="TextBox 18"/>
+          <p:cNvPr id="4" name="TextBox 3"/>
           <p:cNvSpPr txBox="1"/>
           <p:nvPr/>
         </p:nvSpPr>
         <p:spPr>
           <a:xfrm>
-            <a:off x="594360" y="4572000"/>
-            <a:ext cx="2377440" cy="822960"/>
+            <a:off x="731520" y="1600200"/>
+            <a:ext cx="10698480" cy="914400"/>
           </a:xfrm>
           <a:prstGeom prst="rect">
             <a:avLst/>
@@ -4264,25 +4700,24 @@
             <a:r>
               <a:rPr sz="1600" b="0" i="0">
                 <a:solidFill>
-                  <a:srgbClr val="333333"/>
+                  <a:srgbClr val="FFFFFF"/>
                 </a:solidFill>
               </a:rPr>
-              <a:t>High-volume classification
-(batch, latency-tolerant)</a:t>
-            </a:r>
-          </a:p>
-        </p:txBody>
-      </p:sp>
-      <p:sp>
-        <p:nvSpPr>
-          <p:cNvPr id="20" name="TextBox 19"/>
+              <a:t>▸  The scorecard is a simple forcing function: before you run any benchmark, you write down which dimensions matter for you</a:t>
+            </a:r>
+          </a:p>
+        </p:txBody>
+      </p:sp>
+      <p:sp>
+        <p:nvSpPr>
+          <p:cNvPr id="5" name="TextBox 4"/>
           <p:cNvSpPr txBox="1"/>
           <p:nvPr/>
         </p:nvSpPr>
         <p:spPr>
           <a:xfrm>
-            <a:off x="3063240" y="4572000"/>
-            <a:ext cx="2743200" cy="822960"/>
+            <a:off x="731520" y="2468880"/>
+            <a:ext cx="10698480" cy="914400"/>
           </a:xfrm>
           <a:prstGeom prst="rect">
             <a:avLst/>
@@ -4299,24 +4734,24 @@
             <a:r>
               <a:rPr sz="1600" b="0" i="0">
                 <a:solidFill>
-                  <a:srgbClr val="333333"/>
+                  <a:srgbClr val="FFFFFF"/>
                 </a:solidFill>
               </a:rPr>
-              <a:t>Cost-per-task</a:t>
-            </a:r>
-          </a:p>
-        </p:txBody>
-      </p:sp>
-      <p:sp>
-        <p:nvSpPr>
-          <p:cNvPr id="21" name="TextBox 20"/>
+              <a:t>▸  model="claude-sonnet-4-6"</a:t>
+            </a:r>
+          </a:p>
+        </p:txBody>
+      </p:sp>
+      <p:sp>
+        <p:nvSpPr>
+          <p:cNvPr id="6" name="TextBox 5"/>
           <p:cNvSpPr txBox="1"/>
           <p:nvPr/>
         </p:nvSpPr>
         <p:spPr>
           <a:xfrm>
-            <a:off x="5897880" y="4572000"/>
-            <a:ext cx="2743200" cy="822960"/>
+            <a:off x="731520" y="3337560"/>
+            <a:ext cx="10698480" cy="914400"/>
           </a:xfrm>
           <a:prstGeom prst="rect">
             <a:avLst/>
@@ -4333,24 +4768,24 @@
             <a:r>
               <a:rPr sz="1600" b="0" i="0">
                 <a:solidFill>
-                  <a:srgbClr val="333333"/>
+                  <a:srgbClr val="FFFFFF"/>
                 </a:solidFill>
               </a:rPr>
-              <a:t>Structured-output reliability</a:t>
-            </a:r>
-          </a:p>
-        </p:txBody>
-      </p:sp>
-      <p:sp>
-        <p:nvSpPr>
-          <p:cNvPr id="22" name="TextBox 21"/>
+              <a:t>▸  prompt="I'm building a coding agent that reads a GitHub issue, calls 3–5 tools (file read, grep, test run, PR create), a</a:t>
+            </a:r>
+          </a:p>
+        </p:txBody>
+      </p:sp>
+      <p:sp>
+        <p:nvSpPr>
+          <p:cNvPr id="7" name="TextBox 6"/>
           <p:cNvSpPr txBox="1"/>
           <p:nvPr/>
         </p:nvSpPr>
         <p:spPr>
           <a:xfrm>
-            <a:off x="8732520" y="4572000"/>
-            <a:ext cx="3291840" cy="822960"/>
+            <a:off x="731520" y="6309360"/>
+            <a:ext cx="10698480" cy="365760"/>
           </a:xfrm>
           <a:prstGeom prst="rect">
             <a:avLst/>
@@ -4365,12 +4800,12 @@
           <a:p>
             <a:pPr algn="l"/>
             <a:r>
-              <a:rPr sz="1600" b="0" i="0">
-                <a:solidFill>
-                  <a:srgbClr val="333333"/>
+              <a:rPr sz="1000" b="0" i="0">
+                <a:solidFill>
+                  <a:srgbClr val="A1A1AA"/>
                 </a:solidFill>
               </a:rPr>
-              <a:t>Cost &gt; 2× competitor</a:t>
+              <a:t>academy.kspl.tech | Koenig AI Academy</a:t>
             </a:r>
           </a:p>
         </p:txBody>
@@ -4383,13 +4818,13 @@
 </p:sld>
 </file>
 
-<file path=ppt/slides/slide12.xml><?xml version="1.0" encoding="utf-8"?>
+<file path=ppt/slides/slide8.xml><?xml version="1.0" encoding="utf-8"?>
 <p:sld xmlns:a="http://schemas.openxmlformats.org/drawingml/2006/main" xmlns:p="http://schemas.openxmlformats.org/presentationml/2006/main" xmlns:r="http://schemas.openxmlformats.org/officeDocument/2006/relationships">
   <p:cSld>
     <p:bg>
       <p:bgPr>
         <a:solidFill>
-          <a:srgbClr val="F4F6F8"/>
+          <a:srgbClr val="18181B"/>
         </a:solidFill>
         <a:effectLst/>
       </p:bgPr>
@@ -4409,8 +4844,8 @@
         </p:nvSpPr>
         <p:spPr>
           <a:xfrm>
-            <a:off x="548640" y="320040"/>
-            <a:ext cx="11064240" cy="731520"/>
+            <a:off x="731520" y="320040"/>
+            <a:ext cx="10698480" cy="1005840"/>
           </a:xfrm>
           <a:prstGeom prst="rect">
             <a:avLst/>
@@ -4425,12 +4860,12 @@
           <a:p>
             <a:pPr algn="l"/>
             <a:r>
-              <a:rPr sz="3400" b="1" i="0">
-                <a:solidFill>
-                  <a:srgbClr val="0F2B46"/>
+              <a:rPr sz="2600" b="1" i="0">
+                <a:solidFill>
+                  <a:srgbClr val="FFFFFF"/>
                 </a:solidFill>
               </a:rPr>
-              <a:t>Building your scorecard — 3 rules</a:t>
+              <a:t>Hands-on exercise</a:t>
             </a:r>
           </a:p>
         </p:txBody>
@@ -4443,14 +4878,14 @@
         </p:nvSpPr>
         <p:spPr>
           <a:xfrm>
-            <a:off x="548640" y="1097280"/>
-            <a:ext cx="11064240" cy="27432"/>
+            <a:off x="731520" y="1417320"/>
+            <a:ext cx="10698480" cy="36576"/>
           </a:xfrm>
           <a:prstGeom prst="rect">
             <a:avLst/>
           </a:prstGeom>
           <a:solidFill>
-            <a:srgbClr val="009EB5"/>
+            <a:srgbClr val="A1A1AA"/>
           </a:solidFill>
           <a:ln>
             <a:noFill/>
@@ -4486,8 +4921,8 @@
         </p:nvSpPr>
         <p:spPr>
           <a:xfrm>
-            <a:off x="777240" y="1280160"/>
-            <a:ext cx="10607040" cy="548640"/>
+            <a:off x="731520" y="1600200"/>
+            <a:ext cx="10698480" cy="914400"/>
           </a:xfrm>
           <a:prstGeom prst="rect">
             <a:avLst/>
@@ -4500,13 +4935,14 @@
           </a:bodyPr>
           <a:lstStyle/>
           <a:p>
-            <a:r>
-              <a:rPr sz="2000">
-                <a:solidFill>
-                  <a:srgbClr val="333333"/>
+            <a:pPr algn="l"/>
+            <a:r>
+              <a:rPr sz="1600" b="0" i="0">
+                <a:solidFill>
+                  <a:srgbClr val="FFFFFF"/>
                 </a:solidFill>
               </a:rPr>
-              <a:t>▸  Weights reflect your production SLA, not generic impressiveness</a:t>
+              <a:t>▸  Build a scorecard for your use case.</a:t>
             </a:r>
           </a:p>
         </p:txBody>
@@ -4519,8 +4955,8 @@
         </p:nvSpPr>
         <p:spPr>
           <a:xfrm>
-            <a:off x="777240" y="1847088"/>
-            <a:ext cx="10607040" cy="548640"/>
+            <a:off x="731520" y="2468880"/>
+            <a:ext cx="10698480" cy="914400"/>
           </a:xfrm>
           <a:prstGeom prst="rect">
             <a:avLst/>
@@ -4533,13 +4969,14 @@
           </a:bodyPr>
           <a:lstStyle/>
           <a:p>
-            <a:r>
-              <a:rPr sz="2000">
-                <a:solidFill>
-                  <a:srgbClr val="333333"/>
+            <a:pPr algn="l"/>
+            <a:r>
+              <a:rPr sz="1600" b="0" i="0">
+                <a:solidFill>
+                  <a:srgbClr val="FFFFFF"/>
                 </a:solidFill>
               </a:rPr>
-              <a:t>▸  Include a disqualifier — a threshold that eliminates a model regardless</a:t>
+              <a:t>▸  Choose one of the three archetypes above as your starting point, or describe your own use case in 2–3 sentences.</a:t>
             </a:r>
           </a:p>
         </p:txBody>
@@ -4552,8 +4989,8 @@
         </p:nvSpPr>
         <p:spPr>
           <a:xfrm>
-            <a:off x="777240" y="2414016"/>
-            <a:ext cx="10607040" cy="548640"/>
+            <a:off x="731520" y="3337560"/>
+            <a:ext cx="10698480" cy="914400"/>
           </a:xfrm>
           <a:prstGeom prst="rect">
             <a:avLst/>
@@ -4566,13 +5003,14 @@
           </a:bodyPr>
           <a:lstStyle/>
           <a:p>
-            <a:r>
-              <a:rPr sz="2000">
-                <a:solidFill>
-                  <a:srgbClr val="333333"/>
+            <a:pPr algn="l"/>
+            <a:r>
+              <a:rPr sz="1600" b="0" i="0">
+                <a:solidFill>
+                  <a:srgbClr val="FFFFFF"/>
                 </a:solidFill>
               </a:rPr>
-              <a:t>▸  Write the scorecard before you see the benchmark results</a:t>
+              <a:t>▸  Select 5 dimensions from this list: tool-use determinism, context fidelity at depth, structured-output reliability, late</a:t>
             </a:r>
           </a:p>
         </p:txBody>
@@ -4585,8 +5023,8 @@
         </p:nvSpPr>
         <p:spPr>
           <a:xfrm>
-            <a:off x="548640" y="6309360"/>
-            <a:ext cx="11064240" cy="365760"/>
+            <a:off x="731520" y="6309360"/>
+            <a:ext cx="10698480" cy="365760"/>
           </a:xfrm>
           <a:prstGeom prst="rect">
             <a:avLst/>
@@ -4601,2580 +5039,12 @@
           <a:p>
             <a:pPr algn="l"/>
             <a:r>
-              <a:rPr sz="1300" b="0" i="1">
-                <a:solidFill>
-                  <a:srgbClr val="009EB5"/>
+              <a:rPr sz="1000" b="0" i="0">
+                <a:solidFill>
+                  <a:srgbClr val="A1A1AA"/>
                 </a:solidFill>
               </a:rPr>
-              <a:t>Exercise: select 5 dimensions, assign weights summing to 15, name one disqualifier</a:t>
-            </a:r>
-          </a:p>
-        </p:txBody>
-      </p:sp>
-    </p:spTree>
-  </p:cSld>
-  <p:clrMapOvr>
-    <a:masterClrMapping/>
-  </p:clrMapOvr>
-</p:sld>
-</file>
-
-<file path=ppt/slides/slide13.xml><?xml version="1.0" encoding="utf-8"?>
-<p:sld xmlns:a="http://schemas.openxmlformats.org/drawingml/2006/main" xmlns:p="http://schemas.openxmlformats.org/presentationml/2006/main" xmlns:r="http://schemas.openxmlformats.org/officeDocument/2006/relationships">
-  <p:cSld>
-    <p:bg>
-      <p:bgPr>
-        <a:solidFill>
-          <a:srgbClr val="0F2B46"/>
-        </a:solidFill>
-        <a:effectLst/>
-      </p:bgPr>
-    </p:bg>
-    <p:spTree>
-      <p:nvGrpSpPr>
-        <p:cNvPr id="1" name=""/>
-        <p:cNvGrpSpPr/>
-        <p:nvPr/>
-      </p:nvGrpSpPr>
-      <p:grpSpPr/>
-      <p:sp>
-        <p:nvSpPr>
-          <p:cNvPr id="2" name="TextBox 1"/>
-          <p:cNvSpPr txBox="1"/>
-          <p:nvPr/>
-        </p:nvSpPr>
-        <p:spPr>
-          <a:xfrm>
-            <a:off x="548640" y="548640"/>
-            <a:ext cx="10972800" cy="640080"/>
-          </a:xfrm>
-          <a:prstGeom prst="rect">
-            <a:avLst/>
-          </a:prstGeom>
-          <a:noFill/>
-        </p:spPr>
-        <p:txBody>
-          <a:bodyPr wrap="square">
-            <a:spAutoFit/>
-          </a:bodyPr>
-          <a:lstStyle/>
-          <a:p>
-            <a:pPr algn="l"/>
-            <a:r>
-              <a:rPr sz="2200" b="1" i="0">
-                <a:solidFill>
-                  <a:srgbClr val="009EB5"/>
-                </a:solidFill>
-              </a:rPr>
-              <a:t>Try it next →</a:t>
-            </a:r>
-          </a:p>
-        </p:txBody>
-      </p:sp>
-      <p:sp>
-        <p:nvSpPr>
-          <p:cNvPr id="3" name="TextBox 2"/>
-          <p:cNvSpPr txBox="1"/>
-          <p:nvPr/>
-        </p:nvSpPr>
-        <p:spPr>
-          <a:xfrm>
-            <a:off x="548640" y="1234440"/>
-            <a:ext cx="10972800" cy="1097280"/>
-          </a:xfrm>
-          <a:prstGeom prst="rect">
-            <a:avLst/>
-          </a:prstGeom>
-          <a:noFill/>
-        </p:spPr>
-        <p:txBody>
-          <a:bodyPr wrap="square">
-            <a:spAutoFit/>
-          </a:bodyPr>
-          <a:lstStyle/>
-          <a:p>
-            <a:pPr algn="l"/>
-            <a:r>
-              <a:rPr sz="4200" b="1" i="0">
-                <a:solidFill>
-                  <a:srgbClr val="FFFFFF"/>
-                </a:solidFill>
-              </a:rPr>
-              <a:t>Chapter 2: Tool-use determinism benchmark</a:t>
-            </a:r>
-          </a:p>
-        </p:txBody>
-      </p:sp>
-      <p:sp>
-        <p:nvSpPr>
-          <p:cNvPr id="4" name="TextBox 3"/>
-          <p:cNvSpPr txBox="1"/>
-          <p:nvPr/>
-        </p:nvSpPr>
-        <p:spPr>
-          <a:xfrm>
-            <a:off x="548640" y="2514600"/>
-            <a:ext cx="10972800" cy="1280160"/>
-          </a:xfrm>
-          <a:prstGeom prst="rect">
-            <a:avLst/>
-          </a:prstGeom>
-          <a:noFill/>
-        </p:spPr>
-        <p:txBody>
-          <a:bodyPr wrap="square">
-            <a:spAutoFit/>
-          </a:bodyPr>
-          <a:lstStyle/>
-          <a:p>
-            <a:pPr algn="l"/>
-            <a:r>
-              <a:rPr sz="2200" b="0" i="0">
-                <a:solidFill>
-                  <a:srgbClr val="F4F6F8"/>
-                </a:solidFill>
-              </a:rPr>
-              <a:t>Run the 10×3×5 benchmark across Opus 4.7, GPT-5.5, and Gemini 3.1 Pro.
-See which model keeps its structure when your pipeline depends on it.</a:t>
-            </a:r>
-          </a:p>
-        </p:txBody>
-      </p:sp>
-      <p:sp>
-        <p:nvSpPr>
-          <p:cNvPr id="5" name="TextBox 4"/>
-          <p:cNvSpPr txBox="1"/>
-          <p:nvPr/>
-        </p:nvSpPr>
-        <p:spPr>
-          <a:xfrm>
-            <a:off x="548640" y="3840480"/>
-            <a:ext cx="10972800" cy="1828800"/>
-          </a:xfrm>
-          <a:prstGeom prst="rect">
-            <a:avLst/>
-          </a:prstGeom>
-          <a:noFill/>
-        </p:spPr>
-        <p:txBody>
-          <a:bodyPr wrap="square">
-            <a:spAutoFit/>
-          </a:bodyPr>
-          <a:lstStyle/>
-          <a:p>
-            <a:pPr algn="l"/>
-            <a:r>
-              <a:rPr sz="1900" b="0" i="0">
-                <a:solidFill>
-                  <a:srgbClr val="F4F6F8"/>
-                </a:solidFill>
-              </a:rPr>
-              <a:t>Before you go — build your scorecard:
-  1.  Pick your use-case archetype (or describe your own)
-  2.  Select 5 dimensions, weights summing to 15
-  3.  Name your disqualifier
-  4.  Write it down before you run any benchmark</a:t>
-            </a:r>
-          </a:p>
-        </p:txBody>
-      </p:sp>
-      <p:sp>
-        <p:nvSpPr>
-          <p:cNvPr id="6" name="Rectangle 5"/>
-          <p:cNvSpPr/>
-          <p:nvPr/>
-        </p:nvSpPr>
-        <p:spPr>
-          <a:xfrm>
-            <a:off x="0" y="6309360"/>
-            <a:ext cx="12188952" cy="548640"/>
-          </a:xfrm>
-          <a:prstGeom prst="rect">
-            <a:avLst/>
-          </a:prstGeom>
-          <a:solidFill>
-            <a:srgbClr val="009EB5"/>
-          </a:solidFill>
-          <a:ln>
-            <a:noFill/>
-          </a:ln>
-        </p:spPr>
-        <p:style>
-          <a:lnRef idx="1">
-            <a:schemeClr val="accent1"/>
-          </a:lnRef>
-          <a:fillRef idx="3">
-            <a:schemeClr val="accent1"/>
-          </a:fillRef>
-          <a:effectRef idx="2">
-            <a:schemeClr val="accent1"/>
-          </a:effectRef>
-          <a:fontRef idx="minor">
-            <a:schemeClr val="lt1"/>
-          </a:fontRef>
-        </p:style>
-        <p:txBody>
-          <a:bodyPr rtlCol="0" anchor="ctr"/>
-          <a:lstStyle/>
-          <a:p>
-            <a:pPr algn="ctr"/>
-          </a:p>
-        </p:txBody>
-      </p:sp>
-      <p:sp>
-        <p:nvSpPr>
-          <p:cNvPr id="7" name="TextBox 6"/>
-          <p:cNvSpPr txBox="1"/>
-          <p:nvPr/>
-        </p:nvSpPr>
-        <p:spPr>
-          <a:xfrm>
-            <a:off x="457200" y="6355080"/>
-            <a:ext cx="10972800" cy="365760"/>
-          </a:xfrm>
-          <a:prstGeom prst="rect">
-            <a:avLst/>
-          </a:prstGeom>
-          <a:noFill/>
-        </p:spPr>
-        <p:txBody>
-          <a:bodyPr wrap="square">
-            <a:spAutoFit/>
-          </a:bodyPr>
-          <a:lstStyle/>
-          <a:p>
-            <a:pPr algn="l"/>
-            <a:r>
-              <a:rPr sz="1300" b="0" i="0">
-                <a:solidFill>
-                  <a:srgbClr val="0F2B46"/>
-                </a:solidFill>
-              </a:rPr>
-              <a:t>Koenig AI Academy  ·  academy.kspl.tech  ·  Chapter 2 →</a:t>
-            </a:r>
-          </a:p>
-        </p:txBody>
-      </p:sp>
-    </p:spTree>
-  </p:cSld>
-  <p:clrMapOvr>
-    <a:masterClrMapping/>
-  </p:clrMapOvr>
-</p:sld>
-</file>
-
-<file path=ppt/slides/slide2.xml><?xml version="1.0" encoding="utf-8"?>
-<p:sld xmlns:a="http://schemas.openxmlformats.org/drawingml/2006/main" xmlns:p="http://schemas.openxmlformats.org/presentationml/2006/main" xmlns:r="http://schemas.openxmlformats.org/officeDocument/2006/relationships">
-  <p:cSld>
-    <p:bg>
-      <p:bgPr>
-        <a:solidFill>
-          <a:srgbClr val="0F2B46"/>
-        </a:solidFill>
-        <a:effectLst/>
-      </p:bgPr>
-    </p:bg>
-    <p:spTree>
-      <p:nvGrpSpPr>
-        <p:cNvPr id="1" name=""/>
-        <p:cNvGrpSpPr/>
-        <p:nvPr/>
-      </p:nvGrpSpPr>
-      <p:grpSpPr/>
-      <p:sp>
-        <p:nvSpPr>
-          <p:cNvPr id="2" name="TextBox 1"/>
-          <p:cNvSpPr txBox="1"/>
-          <p:nvPr/>
-        </p:nvSpPr>
-        <p:spPr>
-          <a:xfrm>
-            <a:off x="548640" y="320040"/>
-            <a:ext cx="11064240" cy="731520"/>
-          </a:xfrm>
-          <a:prstGeom prst="rect">
-            <a:avLst/>
-          </a:prstGeom>
-          <a:noFill/>
-        </p:spPr>
-        <p:txBody>
-          <a:bodyPr wrap="square">
-            <a:spAutoFit/>
-          </a:bodyPr>
-          <a:lstStyle/>
-          <a:p>
-            <a:pPr algn="l"/>
-            <a:r>
-              <a:rPr sz="3400" b="1" i="0">
-                <a:solidFill>
-                  <a:srgbClr val="009EB5"/>
-                </a:solidFill>
-              </a:rPr>
-              <a:t>What you'll be able to do</a:t>
-            </a:r>
-          </a:p>
-        </p:txBody>
-      </p:sp>
-      <p:sp>
-        <p:nvSpPr>
-          <p:cNvPr id="3" name="Rectangle 2"/>
-          <p:cNvSpPr/>
-          <p:nvPr/>
-        </p:nvSpPr>
-        <p:spPr>
-          <a:xfrm>
-            <a:off x="548640" y="1097280"/>
-            <a:ext cx="11064240" cy="27432"/>
-          </a:xfrm>
-          <a:prstGeom prst="rect">
-            <a:avLst/>
-          </a:prstGeom>
-          <a:solidFill>
-            <a:srgbClr val="009EB5"/>
-          </a:solidFill>
-          <a:ln>
-            <a:noFill/>
-          </a:ln>
-        </p:spPr>
-        <p:style>
-          <a:lnRef idx="1">
-            <a:schemeClr val="accent1"/>
-          </a:lnRef>
-          <a:fillRef idx="3">
-            <a:schemeClr val="accent1"/>
-          </a:fillRef>
-          <a:effectRef idx="2">
-            <a:schemeClr val="accent1"/>
-          </a:effectRef>
-          <a:fontRef idx="minor">
-            <a:schemeClr val="lt1"/>
-          </a:fontRef>
-        </p:style>
-        <p:txBody>
-          <a:bodyPr rtlCol="0" anchor="ctr"/>
-          <a:lstStyle/>
-          <a:p>
-            <a:pPr algn="ctr"/>
-          </a:p>
-        </p:txBody>
-      </p:sp>
-      <p:sp>
-        <p:nvSpPr>
-          <p:cNvPr id="4" name="TextBox 3"/>
-          <p:cNvSpPr txBox="1"/>
-          <p:nvPr/>
-        </p:nvSpPr>
-        <p:spPr>
-          <a:xfrm>
-            <a:off x="777240" y="1280160"/>
-            <a:ext cx="10607040" cy="548640"/>
-          </a:xfrm>
-          <a:prstGeom prst="rect">
-            <a:avLst/>
-          </a:prstGeom>
-          <a:noFill/>
-        </p:spPr>
-        <p:txBody>
-          <a:bodyPr wrap="square">
-            <a:spAutoFit/>
-          </a:bodyPr>
-          <a:lstStyle/>
-          <a:p>
-            <a:r>
-              <a:rPr sz="2000">
-                <a:solidFill>
-                  <a:srgbClr val="FFFFFF"/>
-                </a:solidFill>
-              </a:rPr>
-              <a:t>▸  Name the 5 evaluation dimensions that predict production success</a:t>
-            </a:r>
-          </a:p>
-        </p:txBody>
-      </p:sp>
-      <p:sp>
-        <p:nvSpPr>
-          <p:cNvPr id="5" name="TextBox 4"/>
-          <p:cNvSpPr txBox="1"/>
-          <p:nvPr/>
-        </p:nvSpPr>
-        <p:spPr>
-          <a:xfrm>
-            <a:off x="777240" y="1847088"/>
-            <a:ext cx="10607040" cy="548640"/>
-          </a:xfrm>
-          <a:prstGeom prst="rect">
-            <a:avLst/>
-          </a:prstGeom>
-          <a:noFill/>
-        </p:spPr>
-        <p:txBody>
-          <a:bodyPr wrap="square">
-            <a:spAutoFit/>
-          </a:bodyPr>
-          <a:lstStyle/>
-          <a:p>
-            <a:r>
-              <a:rPr sz="2000">
-                <a:solidFill>
-                  <a:srgbClr val="FFFFFF"/>
-                </a:solidFill>
-              </a:rPr>
-              <a:t>▸  Identify 3 popular benchmarks that correlate poorly with real outcomes</a:t>
-            </a:r>
-          </a:p>
-        </p:txBody>
-      </p:sp>
-      <p:sp>
-        <p:nvSpPr>
-          <p:cNvPr id="6" name="TextBox 5"/>
-          <p:cNvSpPr txBox="1"/>
-          <p:nvPr/>
-        </p:nvSpPr>
-        <p:spPr>
-          <a:xfrm>
-            <a:off x="777240" y="2414016"/>
-            <a:ext cx="10607040" cy="548640"/>
-          </a:xfrm>
-          <a:prstGeom prst="rect">
-            <a:avLst/>
-          </a:prstGeom>
-          <a:noFill/>
-        </p:spPr>
-        <p:txBody>
-          <a:bodyPr wrap="square">
-            <a:spAutoFit/>
-          </a:bodyPr>
-          <a:lstStyle/>
-          <a:p>
-            <a:r>
-              <a:rPr sz="2000">
-                <a:solidFill>
-                  <a:srgbClr val="FFFFFF"/>
-                </a:solidFill>
-              </a:rPr>
-              <a:t>▸  Build a custom, weighted scorecard for your specific use case</a:t>
-            </a:r>
-          </a:p>
-        </p:txBody>
-      </p:sp>
-      <p:sp>
-        <p:nvSpPr>
-          <p:cNvPr id="7" name="TextBox 6"/>
-          <p:cNvSpPr txBox="1"/>
-          <p:nvPr/>
-        </p:nvSpPr>
-        <p:spPr>
-          <a:xfrm>
-            <a:off x="777240" y="2980944"/>
-            <a:ext cx="10607040" cy="548640"/>
-          </a:xfrm>
-          <a:prstGeom prst="rect">
-            <a:avLst/>
-          </a:prstGeom>
-          <a:noFill/>
-        </p:spPr>
-        <p:txBody>
-          <a:bodyPr wrap="square">
-            <a:spAutoFit/>
-          </a:bodyPr>
-          <a:lstStyle/>
-          <a:p>
-            <a:r>
-              <a:rPr sz="2000">
-                <a:solidFill>
-                  <a:srgbClr val="FFFFFF"/>
-                </a:solidFill>
-              </a:rPr>
-              <a:t>▸  Distinguish 'frontier model' from 'best model for your use case'</a:t>
-            </a:r>
-          </a:p>
-        </p:txBody>
-      </p:sp>
-      <p:sp>
-        <p:nvSpPr>
-          <p:cNvPr id="8" name="TextBox 7"/>
-          <p:cNvSpPr txBox="1"/>
-          <p:nvPr/>
-        </p:nvSpPr>
-        <p:spPr>
-          <a:xfrm>
-            <a:off x="548640" y="6309360"/>
-            <a:ext cx="11064240" cy="365760"/>
-          </a:xfrm>
-          <a:prstGeom prst="rect">
-            <a:avLst/>
-          </a:prstGeom>
-          <a:noFill/>
-        </p:spPr>
-        <p:txBody>
-          <a:bodyPr wrap="square">
-            <a:spAutoFit/>
-          </a:bodyPr>
-          <a:lstStyle/>
-          <a:p>
-            <a:pPr algn="l"/>
-            <a:r>
-              <a:rPr sz="1300" b="0" i="1">
-                <a:solidFill>
-                  <a:srgbClr val="009EB5"/>
-                </a:solidFill>
-              </a:rPr>
-              <a:t>Estimated time: 40 minutes  ·  Prerequisites: none</a:t>
-            </a:r>
-          </a:p>
-        </p:txBody>
-      </p:sp>
-    </p:spTree>
-  </p:cSld>
-  <p:clrMapOvr>
-    <a:masterClrMapping/>
-  </p:clrMapOvr>
-</p:sld>
-</file>
-
-<file path=ppt/slides/slide3.xml><?xml version="1.0" encoding="utf-8"?>
-<p:sld xmlns:a="http://schemas.openxmlformats.org/drawingml/2006/main" xmlns:p="http://schemas.openxmlformats.org/presentationml/2006/main" xmlns:r="http://schemas.openxmlformats.org/officeDocument/2006/relationships">
-  <p:cSld>
-    <p:bg>
-      <p:bgPr>
-        <a:solidFill>
-          <a:srgbClr val="0F2B46"/>
-        </a:solidFill>
-        <a:effectLst/>
-      </p:bgPr>
-    </p:bg>
-    <p:spTree>
-      <p:nvGrpSpPr>
-        <p:cNvPr id="1" name=""/>
-        <p:cNvGrpSpPr/>
-        <p:nvPr/>
-      </p:nvGrpSpPr>
-      <p:grpSpPr/>
-      <p:sp>
-        <p:nvSpPr>
-          <p:cNvPr id="2" name="TextBox 1"/>
-          <p:cNvSpPr txBox="1"/>
-          <p:nvPr/>
-        </p:nvSpPr>
-        <p:spPr>
-          <a:xfrm>
-            <a:off x="548640" y="320040"/>
-            <a:ext cx="11064240" cy="731520"/>
-          </a:xfrm>
-          <a:prstGeom prst="rect">
-            <a:avLst/>
-          </a:prstGeom>
-          <a:noFill/>
-        </p:spPr>
-        <p:txBody>
-          <a:bodyPr wrap="square">
-            <a:spAutoFit/>
-          </a:bodyPr>
-          <a:lstStyle/>
-          <a:p>
-            <a:pPr algn="l"/>
-            <a:r>
-              <a:rPr sz="3400" b="1" i="0">
-                <a:solidFill>
-                  <a:srgbClr val="009EB5"/>
-                </a:solidFill>
-              </a:rPr>
-              <a:t>Why standard benchmarks fail builders</a:t>
-            </a:r>
-          </a:p>
-        </p:txBody>
-      </p:sp>
-      <p:sp>
-        <p:nvSpPr>
-          <p:cNvPr id="3" name="Rectangle 2"/>
-          <p:cNvSpPr/>
-          <p:nvPr/>
-        </p:nvSpPr>
-        <p:spPr>
-          <a:xfrm>
-            <a:off x="548640" y="1097280"/>
-            <a:ext cx="11064240" cy="27432"/>
-          </a:xfrm>
-          <a:prstGeom prst="rect">
-            <a:avLst/>
-          </a:prstGeom>
-          <a:solidFill>
-            <a:srgbClr val="009EB5"/>
-          </a:solidFill>
-          <a:ln>
-            <a:noFill/>
-          </a:ln>
-        </p:spPr>
-        <p:style>
-          <a:lnRef idx="1">
-            <a:schemeClr val="accent1"/>
-          </a:lnRef>
-          <a:fillRef idx="3">
-            <a:schemeClr val="accent1"/>
-          </a:fillRef>
-          <a:effectRef idx="2">
-            <a:schemeClr val="accent1"/>
-          </a:effectRef>
-          <a:fontRef idx="minor">
-            <a:schemeClr val="lt1"/>
-          </a:fontRef>
-        </p:style>
-        <p:txBody>
-          <a:bodyPr rtlCol="0" anchor="ctr"/>
-          <a:lstStyle/>
-          <a:p>
-            <a:pPr algn="ctr"/>
-          </a:p>
-        </p:txBody>
-      </p:sp>
-      <p:sp>
-        <p:nvSpPr>
-          <p:cNvPr id="4" name="TextBox 3"/>
-          <p:cNvSpPr txBox="1"/>
-          <p:nvPr/>
-        </p:nvSpPr>
-        <p:spPr>
-          <a:xfrm>
-            <a:off x="777240" y="1280160"/>
-            <a:ext cx="10607040" cy="548640"/>
-          </a:xfrm>
-          <a:prstGeom prst="rect">
-            <a:avLst/>
-          </a:prstGeom>
-          <a:noFill/>
-        </p:spPr>
-        <p:txBody>
-          <a:bodyPr wrap="square">
-            <a:spAutoFit/>
-          </a:bodyPr>
-          <a:lstStyle/>
-          <a:p>
-            <a:r>
-              <a:rPr sz="2000">
-                <a:solidFill>
-                  <a:srgbClr val="FFFFFF"/>
-                </a:solidFill>
-              </a:rPr>
-              <a:t>▸  MMLU, HumanEval, GPQA — the three most-cited release benchmarks</a:t>
-            </a:r>
-          </a:p>
-        </p:txBody>
-      </p:sp>
-      <p:sp>
-        <p:nvSpPr>
-          <p:cNvPr id="5" name="TextBox 4"/>
-          <p:cNvSpPr txBox="1"/>
-          <p:nvPr/>
-        </p:nvSpPr>
-        <p:spPr>
-          <a:xfrm>
-            <a:off x="777240" y="1847088"/>
-            <a:ext cx="10607040" cy="548640"/>
-          </a:xfrm>
-          <a:prstGeom prst="rect">
-            <a:avLst/>
-          </a:prstGeom>
-          <a:noFill/>
-        </p:spPr>
-        <p:txBody>
-          <a:bodyPr wrap="square">
-            <a:spAutoFit/>
-          </a:bodyPr>
-          <a:lstStyle/>
-          <a:p>
-            <a:r>
-              <a:rPr sz="2000">
-                <a:solidFill>
-                  <a:srgbClr val="FFFFFF"/>
-                </a:solidFill>
-              </a:rPr>
-              <a:t>▸  They measure knowledge recall, single-function code gen, grad-level science</a:t>
-            </a:r>
-          </a:p>
-        </p:txBody>
-      </p:sp>
-      <p:sp>
-        <p:nvSpPr>
-          <p:cNvPr id="6" name="TextBox 5"/>
-          <p:cNvSpPr txBox="1"/>
-          <p:nvPr/>
-        </p:nvSpPr>
-        <p:spPr>
-          <a:xfrm>
-            <a:off x="777240" y="2414016"/>
-            <a:ext cx="10607040" cy="548640"/>
-          </a:xfrm>
-          <a:prstGeom prst="rect">
-            <a:avLst/>
-          </a:prstGeom>
-          <a:noFill/>
-        </p:spPr>
-        <p:txBody>
-          <a:bodyPr wrap="square">
-            <a:spAutoFit/>
-          </a:bodyPr>
-          <a:lstStyle/>
-          <a:p>
-            <a:r>
-              <a:rPr sz="2000">
-                <a:solidFill>
-                  <a:srgbClr val="FFFFFF"/>
-                </a:solidFill>
-              </a:rPr>
-              <a:t>▸  None measures: tool-use consistency, structured-output stability, mid-context retrieval</a:t>
-            </a:r>
-          </a:p>
-        </p:txBody>
-      </p:sp>
-      <p:sp>
-        <p:nvSpPr>
-          <p:cNvPr id="7" name="TextBox 6"/>
-          <p:cNvSpPr txBox="1"/>
-          <p:nvPr/>
-        </p:nvSpPr>
-        <p:spPr>
-          <a:xfrm>
-            <a:off x="777240" y="2980944"/>
-            <a:ext cx="10607040" cy="548640"/>
-          </a:xfrm>
-          <a:prstGeom prst="rect">
-            <a:avLst/>
-          </a:prstGeom>
-          <a:noFill/>
-        </p:spPr>
-        <p:txBody>
-          <a:bodyPr wrap="square">
-            <a:spAutoFit/>
-          </a:bodyPr>
-          <a:lstStyle/>
-          <a:p>
-            <a:r>
-              <a:rPr sz="2000">
-                <a:solidFill>
-                  <a:srgbClr val="FFFFFF"/>
-                </a:solidFill>
-              </a:rPr>
-              <a:t>▸  Builders use them as production proxies — the correlation is weaker than it looks</a:t>
-            </a:r>
-          </a:p>
-        </p:txBody>
-      </p:sp>
-      <p:sp>
-        <p:nvSpPr>
-          <p:cNvPr id="8" name="TextBox 7"/>
-          <p:cNvSpPr txBox="1"/>
-          <p:nvPr/>
-        </p:nvSpPr>
-        <p:spPr>
-          <a:xfrm>
-            <a:off x="777240" y="3547872"/>
-            <a:ext cx="10607040" cy="548640"/>
-          </a:xfrm>
-          <a:prstGeom prst="rect">
-            <a:avLst/>
-          </a:prstGeom>
-          <a:noFill/>
-        </p:spPr>
-        <p:txBody>
-          <a:bodyPr wrap="square">
-            <a:spAutoFit/>
-          </a:bodyPr>
-          <a:lstStyle/>
-          <a:p>
-            <a:r>
-              <a:rPr sz="2000">
-                <a:solidFill>
-                  <a:srgbClr val="FFFFFF"/>
-                </a:solidFill>
-              </a:rPr>
-              <a:t>▸  A 92% MMLU model may still produce malformed JSON on 15% of your API calls</a:t>
-            </a:r>
-          </a:p>
-        </p:txBody>
-      </p:sp>
-    </p:spTree>
-  </p:cSld>
-  <p:clrMapOvr>
-    <a:masterClrMapping/>
-  </p:clrMapOvr>
-</p:sld>
-</file>
-
-<file path=ppt/slides/slide4.xml><?xml version="1.0" encoding="utf-8"?>
-<p:sld xmlns:a="http://schemas.openxmlformats.org/drawingml/2006/main" xmlns:p="http://schemas.openxmlformats.org/presentationml/2006/main" xmlns:r="http://schemas.openxmlformats.org/officeDocument/2006/relationships">
-  <p:cSld>
-    <p:bg>
-      <p:bgPr>
-        <a:solidFill>
-          <a:srgbClr val="0F2B46"/>
-        </a:solidFill>
-        <a:effectLst/>
-      </p:bgPr>
-    </p:bg>
-    <p:spTree>
-      <p:nvGrpSpPr>
-        <p:cNvPr id="1" name=""/>
-        <p:cNvGrpSpPr/>
-        <p:nvPr/>
-      </p:nvGrpSpPr>
-      <p:grpSpPr/>
-      <p:sp>
-        <p:nvSpPr>
-          <p:cNvPr id="2" name="TextBox 1"/>
-          <p:cNvSpPr txBox="1"/>
-          <p:nvPr/>
-        </p:nvSpPr>
-        <p:spPr>
-          <a:xfrm>
-            <a:off x="548640" y="320040"/>
-            <a:ext cx="11064240" cy="731520"/>
-          </a:xfrm>
-          <a:prstGeom prst="rect">
-            <a:avLst/>
-          </a:prstGeom>
-          <a:noFill/>
-        </p:spPr>
-        <p:txBody>
-          <a:bodyPr wrap="square">
-            <a:spAutoFit/>
-          </a:bodyPr>
-          <a:lstStyle/>
-          <a:p>
-            <a:pPr algn="l"/>
-            <a:r>
-              <a:rPr sz="3400" b="1" i="0">
-                <a:solidFill>
-                  <a:srgbClr val="009EB5"/>
-                </a:solidFill>
-              </a:rPr>
-              <a:t>The 3 benchmarks to deprioritize</a:t>
-            </a:r>
-          </a:p>
-        </p:txBody>
-      </p:sp>
-      <p:sp>
-        <p:nvSpPr>
-          <p:cNvPr id="3" name="Rectangle 2"/>
-          <p:cNvSpPr/>
-          <p:nvPr/>
-        </p:nvSpPr>
-        <p:spPr>
-          <a:xfrm>
-            <a:off x="548640" y="1097280"/>
-            <a:ext cx="11064240" cy="27432"/>
-          </a:xfrm>
-          <a:prstGeom prst="rect">
-            <a:avLst/>
-          </a:prstGeom>
-          <a:solidFill>
-            <a:srgbClr val="009EB5"/>
-          </a:solidFill>
-          <a:ln>
-            <a:noFill/>
-          </a:ln>
-        </p:spPr>
-        <p:style>
-          <a:lnRef idx="1">
-            <a:schemeClr val="accent1"/>
-          </a:lnRef>
-          <a:fillRef idx="3">
-            <a:schemeClr val="accent1"/>
-          </a:fillRef>
-          <a:effectRef idx="2">
-            <a:schemeClr val="accent1"/>
-          </a:effectRef>
-          <a:fontRef idx="minor">
-            <a:schemeClr val="lt1"/>
-          </a:fontRef>
-        </p:style>
-        <p:txBody>
-          <a:bodyPr rtlCol="0" anchor="ctr"/>
-          <a:lstStyle/>
-          <a:p>
-            <a:pPr algn="ctr"/>
-          </a:p>
-        </p:txBody>
-      </p:sp>
-      <p:sp>
-        <p:nvSpPr>
-          <p:cNvPr id="4" name="TextBox 3"/>
-          <p:cNvSpPr txBox="1"/>
-          <p:nvPr/>
-        </p:nvSpPr>
-        <p:spPr>
-          <a:xfrm>
-            <a:off x="777240" y="1325880"/>
-            <a:ext cx="10789920" cy="1234440"/>
-          </a:xfrm>
-          <a:prstGeom prst="rect">
-            <a:avLst/>
-          </a:prstGeom>
-          <a:noFill/>
-        </p:spPr>
-        <p:txBody>
-          <a:bodyPr wrap="square">
-            <a:spAutoFit/>
-          </a:bodyPr>
-          <a:lstStyle/>
-          <a:p>
-            <a:r>
-              <a:rPr b="1" sz="2100">
-                <a:solidFill>
-                  <a:srgbClr val="E86A23"/>
-                </a:solidFill>
-              </a:rPr>
-              <a:t>MMLU  </a:t>
-            </a:r>
-            <a:r>
-              <a:rPr sz="2000">
-                <a:solidFill>
-                  <a:srgbClr val="FFFFFF"/>
-                </a:solidFill>
-              </a:rPr>
-              <a:t>— Knowledge recall, 57 academic subjects, multiple-choice</a:t>
-            </a:r>
-          </a:p>
-          <a:p>
-            <a:r>
-              <a:rPr sz="1700" i="1">
-                <a:solidFill>
-                  <a:srgbClr val="009EB5"/>
-                </a:solidFill>
-              </a:rPr>
-              <a:t>    ⚠  Your product doesn't answer bio questions — it calls tools</a:t>
-            </a:r>
-          </a:p>
-        </p:txBody>
-      </p:sp>
-      <p:sp>
-        <p:nvSpPr>
-          <p:cNvPr id="5" name="TextBox 4"/>
-          <p:cNvSpPr txBox="1"/>
-          <p:nvPr/>
-        </p:nvSpPr>
-        <p:spPr>
-          <a:xfrm>
-            <a:off x="777240" y="2624328"/>
-            <a:ext cx="10789920" cy="1234440"/>
-          </a:xfrm>
-          <a:prstGeom prst="rect">
-            <a:avLst/>
-          </a:prstGeom>
-          <a:noFill/>
-        </p:spPr>
-        <p:txBody>
-          <a:bodyPr wrap="square">
-            <a:spAutoFit/>
-          </a:bodyPr>
-          <a:lstStyle/>
-          <a:p>
-            <a:r>
-              <a:rPr b="1" sz="2100">
-                <a:solidFill>
-                  <a:srgbClr val="E86A23"/>
-                </a:solidFill>
-              </a:rPr>
-              <a:t>HumanEval  </a:t>
-            </a:r>
-            <a:r>
-              <a:rPr sz="2000">
-                <a:solidFill>
-                  <a:srgbClr val="FFFFFF"/>
-                </a:solidFill>
-              </a:rPr>
-              <a:t>— Single-function code completion</a:t>
-            </a:r>
-          </a:p>
-          <a:p>
-            <a:r>
-              <a:rPr sz="1700" i="1">
-                <a:solidFill>
-                  <a:srgbClr val="009EB5"/>
-                </a:solidFill>
-              </a:rPr>
-              <a:t>    ⚠  Doesn't capture multi-step, tool-integrated pipelines</a:t>
-            </a:r>
-          </a:p>
-        </p:txBody>
-      </p:sp>
-      <p:sp>
-        <p:nvSpPr>
-          <p:cNvPr id="6" name="TextBox 5"/>
-          <p:cNvSpPr txBox="1"/>
-          <p:nvPr/>
-        </p:nvSpPr>
-        <p:spPr>
-          <a:xfrm>
-            <a:off x="777240" y="3922776"/>
-            <a:ext cx="10789920" cy="1234440"/>
-          </a:xfrm>
-          <a:prstGeom prst="rect">
-            <a:avLst/>
-          </a:prstGeom>
-          <a:noFill/>
-        </p:spPr>
-        <p:txBody>
-          <a:bodyPr wrap="square">
-            <a:spAutoFit/>
-          </a:bodyPr>
-          <a:lstStyle/>
-          <a:p>
-            <a:r>
-              <a:rPr b="1" sz="2100">
-                <a:solidFill>
-                  <a:srgbClr val="E86A23"/>
-                </a:solidFill>
-              </a:rPr>
-              <a:t>GPQA Diamond  </a:t>
-            </a:r>
-            <a:r>
-              <a:rPr sz="2000">
-                <a:solidFill>
-                  <a:srgbClr val="FFFFFF"/>
-                </a:solidFill>
-              </a:rPr>
-              <a:t>— PhD-level science reasoning</a:t>
-            </a:r>
-          </a:p>
-          <a:p>
-            <a:r>
-              <a:rPr sz="1700" i="1">
-                <a:solidFill>
-                  <a:srgbClr val="009EB5"/>
-                </a:solidFill>
-              </a:rPr>
-              <a:t>    ⚠  Excellent for research progress; poor proxy for output structure</a:t>
-            </a:r>
-          </a:p>
-        </p:txBody>
-      </p:sp>
-    </p:spTree>
-  </p:cSld>
-  <p:clrMapOvr>
-    <a:masterClrMapping/>
-  </p:clrMapOvr>
-</p:sld>
-</file>
-
-<file path=ppt/slides/slide5.xml><?xml version="1.0" encoding="utf-8"?>
-<p:sld xmlns:a="http://schemas.openxmlformats.org/drawingml/2006/main" xmlns:p="http://schemas.openxmlformats.org/presentationml/2006/main" xmlns:r="http://schemas.openxmlformats.org/officeDocument/2006/relationships">
-  <p:cSld>
-    <p:bg>
-      <p:bgPr>
-        <a:solidFill>
-          <a:srgbClr val="0F2B46"/>
-        </a:solidFill>
-        <a:effectLst/>
-      </p:bgPr>
-    </p:bg>
-    <p:spTree>
-      <p:nvGrpSpPr>
-        <p:cNvPr id="1" name=""/>
-        <p:cNvGrpSpPr/>
-        <p:nvPr/>
-      </p:nvGrpSpPr>
-      <p:grpSpPr/>
-      <p:sp>
-        <p:nvSpPr>
-          <p:cNvPr id="2" name="TextBox 1"/>
-          <p:cNvSpPr txBox="1"/>
-          <p:nvPr/>
-        </p:nvSpPr>
-        <p:spPr>
-          <a:xfrm>
-            <a:off x="548640" y="274320"/>
-            <a:ext cx="11064240" cy="731520"/>
-          </a:xfrm>
-          <a:prstGeom prst="rect">
-            <a:avLst/>
-          </a:prstGeom>
-          <a:noFill/>
-        </p:spPr>
-        <p:txBody>
-          <a:bodyPr wrap="square">
-            <a:spAutoFit/>
-          </a:bodyPr>
-          <a:lstStyle/>
-          <a:p>
-            <a:pPr algn="l"/>
-            <a:r>
-              <a:rPr sz="3000" b="1" i="0">
-                <a:solidFill>
-                  <a:srgbClr val="009EB5"/>
-                </a:solidFill>
-              </a:rPr>
-              <a:t>The 5 dimensions that predict production success</a:t>
-            </a:r>
-          </a:p>
-        </p:txBody>
-      </p:sp>
-      <p:sp>
-        <p:nvSpPr>
-          <p:cNvPr id="3" name="Rectangle 2"/>
-          <p:cNvSpPr/>
-          <p:nvPr/>
-        </p:nvSpPr>
-        <p:spPr>
-          <a:xfrm>
-            <a:off x="548640" y="1005840"/>
-            <a:ext cx="11064240" cy="27432"/>
-          </a:xfrm>
-          <a:prstGeom prst="rect">
-            <a:avLst/>
-          </a:prstGeom>
-          <a:solidFill>
-            <a:srgbClr val="009EB5"/>
-          </a:solidFill>
-          <a:ln>
-            <a:noFill/>
-          </a:ln>
-        </p:spPr>
-        <p:style>
-          <a:lnRef idx="1">
-            <a:schemeClr val="accent1"/>
-          </a:lnRef>
-          <a:fillRef idx="3">
-            <a:schemeClr val="accent1"/>
-          </a:fillRef>
-          <a:effectRef idx="2">
-            <a:schemeClr val="accent1"/>
-          </a:effectRef>
-          <a:fontRef idx="minor">
-            <a:schemeClr val="lt1"/>
-          </a:fontRef>
-        </p:style>
-        <p:txBody>
-          <a:bodyPr rtlCol="0" anchor="ctr"/>
-          <a:lstStyle/>
-          <a:p>
-            <a:pPr algn="ctr"/>
-          </a:p>
-        </p:txBody>
-      </p:sp>
-      <p:sp>
-        <p:nvSpPr>
-          <p:cNvPr id="4" name="Oval 3"/>
-          <p:cNvSpPr/>
-          <p:nvPr/>
-        </p:nvSpPr>
-        <p:spPr>
-          <a:xfrm>
-            <a:off x="548640" y="1188720"/>
-            <a:ext cx="384048" cy="384048"/>
-          </a:xfrm>
-          <a:prstGeom prst="ellipse">
-            <a:avLst/>
-          </a:prstGeom>
-          <a:solidFill>
-            <a:srgbClr val="009EB5"/>
-          </a:solidFill>
-          <a:ln>
-            <a:noFill/>
-          </a:ln>
-        </p:spPr>
-        <p:style>
-          <a:lnRef idx="1">
-            <a:schemeClr val="accent1"/>
-          </a:lnRef>
-          <a:fillRef idx="3">
-            <a:schemeClr val="accent1"/>
-          </a:fillRef>
-          <a:effectRef idx="2">
-            <a:schemeClr val="accent1"/>
-          </a:effectRef>
-          <a:fontRef idx="minor">
-            <a:schemeClr val="lt1"/>
-          </a:fontRef>
-        </p:style>
-        <p:txBody>
-          <a:bodyPr rtlCol="0" anchor="ctr"/>
-          <a:lstStyle/>
-          <a:p>
-            <a:pPr algn="ctr"/>
-          </a:p>
-        </p:txBody>
-      </p:sp>
-      <p:sp>
-        <p:nvSpPr>
-          <p:cNvPr id="5" name="TextBox 4"/>
-          <p:cNvSpPr txBox="1"/>
-          <p:nvPr/>
-        </p:nvSpPr>
-        <p:spPr>
-          <a:xfrm>
-            <a:off x="585216" y="1170432"/>
-            <a:ext cx="320040" cy="384048"/>
-          </a:xfrm>
-          <a:prstGeom prst="rect">
-            <a:avLst/>
-          </a:prstGeom>
-          <a:noFill/>
-        </p:spPr>
-        <p:txBody>
-          <a:bodyPr wrap="square">
-            <a:spAutoFit/>
-          </a:bodyPr>
-          <a:lstStyle/>
-          <a:p>
-            <a:pPr algn="ctr"/>
-            <a:r>
-              <a:rPr sz="1700" b="1" i="0">
-                <a:solidFill>
-                  <a:srgbClr val="0F2B46"/>
-                </a:solidFill>
-              </a:rPr>
-              <a:t>1</a:t>
-            </a:r>
-          </a:p>
-        </p:txBody>
-      </p:sp>
-      <p:sp>
-        <p:nvSpPr>
-          <p:cNvPr id="6" name="TextBox 5"/>
-          <p:cNvSpPr txBox="1"/>
-          <p:nvPr/>
-        </p:nvSpPr>
-        <p:spPr>
-          <a:xfrm>
-            <a:off x="1051560" y="1143000"/>
-            <a:ext cx="10515600" cy="502920"/>
-          </a:xfrm>
-          <a:prstGeom prst="rect">
-            <a:avLst/>
-          </a:prstGeom>
-          <a:noFill/>
-        </p:spPr>
-        <p:txBody>
-          <a:bodyPr wrap="square">
-            <a:spAutoFit/>
-          </a:bodyPr>
-          <a:lstStyle/>
-          <a:p>
-            <a:r>
-              <a:rPr b="1" sz="2000">
-                <a:solidFill>
-                  <a:srgbClr val="FFFFFF"/>
-                </a:solidFill>
-              </a:rPr>
-              <a:t>Tool-use determinism  </a:t>
-            </a:r>
-            <a:r>
-              <a:rPr sz="1800">
-                <a:solidFill>
-                  <a:srgbClr val="F4F6F8"/>
-                </a:solidFill>
-              </a:rPr>
-              <a:t>— Same prompt → same structured output, every run</a:t>
-            </a:r>
-          </a:p>
-        </p:txBody>
-      </p:sp>
-      <p:sp>
-        <p:nvSpPr>
-          <p:cNvPr id="7" name="Oval 6"/>
-          <p:cNvSpPr/>
-          <p:nvPr/>
-        </p:nvSpPr>
-        <p:spPr>
-          <a:xfrm>
-            <a:off x="548640" y="2121408"/>
-            <a:ext cx="384048" cy="384048"/>
-          </a:xfrm>
-          <a:prstGeom prst="ellipse">
-            <a:avLst/>
-          </a:prstGeom>
-          <a:solidFill>
-            <a:srgbClr val="009EB5"/>
-          </a:solidFill>
-          <a:ln>
-            <a:noFill/>
-          </a:ln>
-        </p:spPr>
-        <p:style>
-          <a:lnRef idx="1">
-            <a:schemeClr val="accent1"/>
-          </a:lnRef>
-          <a:fillRef idx="3">
-            <a:schemeClr val="accent1"/>
-          </a:fillRef>
-          <a:effectRef idx="2">
-            <a:schemeClr val="accent1"/>
-          </a:effectRef>
-          <a:fontRef idx="minor">
-            <a:schemeClr val="lt1"/>
-          </a:fontRef>
-        </p:style>
-        <p:txBody>
-          <a:bodyPr rtlCol="0" anchor="ctr"/>
-          <a:lstStyle/>
-          <a:p>
-            <a:pPr algn="ctr"/>
-          </a:p>
-        </p:txBody>
-      </p:sp>
-      <p:sp>
-        <p:nvSpPr>
-          <p:cNvPr id="8" name="TextBox 7"/>
-          <p:cNvSpPr txBox="1"/>
-          <p:nvPr/>
-        </p:nvSpPr>
-        <p:spPr>
-          <a:xfrm>
-            <a:off x="585216" y="2103120"/>
-            <a:ext cx="320040" cy="384048"/>
-          </a:xfrm>
-          <a:prstGeom prst="rect">
-            <a:avLst/>
-          </a:prstGeom>
-          <a:noFill/>
-        </p:spPr>
-        <p:txBody>
-          <a:bodyPr wrap="square">
-            <a:spAutoFit/>
-          </a:bodyPr>
-          <a:lstStyle/>
-          <a:p>
-            <a:pPr algn="ctr"/>
-            <a:r>
-              <a:rPr sz="1700" b="1" i="0">
-                <a:solidFill>
-                  <a:srgbClr val="0F2B46"/>
-                </a:solidFill>
-              </a:rPr>
-              <a:t>2</a:t>
-            </a:r>
-          </a:p>
-        </p:txBody>
-      </p:sp>
-      <p:sp>
-        <p:nvSpPr>
-          <p:cNvPr id="9" name="TextBox 8"/>
-          <p:cNvSpPr txBox="1"/>
-          <p:nvPr/>
-        </p:nvSpPr>
-        <p:spPr>
-          <a:xfrm>
-            <a:off x="1051560" y="2075688"/>
-            <a:ext cx="10515600" cy="502920"/>
-          </a:xfrm>
-          <a:prstGeom prst="rect">
-            <a:avLst/>
-          </a:prstGeom>
-          <a:noFill/>
-        </p:spPr>
-        <p:txBody>
-          <a:bodyPr wrap="square">
-            <a:spAutoFit/>
-          </a:bodyPr>
-          <a:lstStyle/>
-          <a:p>
-            <a:r>
-              <a:rPr b="1" sz="2000">
-                <a:solidFill>
-                  <a:srgbClr val="FFFFFF"/>
-                </a:solidFill>
-              </a:rPr>
-              <a:t>Context fidelity at depth  </a:t>
-            </a:r>
-            <a:r>
-              <a:rPr sz="1800">
-                <a:solidFill>
-                  <a:srgbClr val="F4F6F8"/>
-                </a:solidFill>
-              </a:rPr>
-              <a:t>— Accurate retrieval anywhere in a long context window</a:t>
-            </a:r>
-          </a:p>
-        </p:txBody>
-      </p:sp>
-      <p:sp>
-        <p:nvSpPr>
-          <p:cNvPr id="10" name="Oval 9"/>
-          <p:cNvSpPr/>
-          <p:nvPr/>
-        </p:nvSpPr>
-        <p:spPr>
-          <a:xfrm>
-            <a:off x="548640" y="3054096"/>
-            <a:ext cx="384048" cy="384048"/>
-          </a:xfrm>
-          <a:prstGeom prst="ellipse">
-            <a:avLst/>
-          </a:prstGeom>
-          <a:solidFill>
-            <a:srgbClr val="009EB5"/>
-          </a:solidFill>
-          <a:ln>
-            <a:noFill/>
-          </a:ln>
-        </p:spPr>
-        <p:style>
-          <a:lnRef idx="1">
-            <a:schemeClr val="accent1"/>
-          </a:lnRef>
-          <a:fillRef idx="3">
-            <a:schemeClr val="accent1"/>
-          </a:fillRef>
-          <a:effectRef idx="2">
-            <a:schemeClr val="accent1"/>
-          </a:effectRef>
-          <a:fontRef idx="minor">
-            <a:schemeClr val="lt1"/>
-          </a:fontRef>
-        </p:style>
-        <p:txBody>
-          <a:bodyPr rtlCol="0" anchor="ctr"/>
-          <a:lstStyle/>
-          <a:p>
-            <a:pPr algn="ctr"/>
-          </a:p>
-        </p:txBody>
-      </p:sp>
-      <p:sp>
-        <p:nvSpPr>
-          <p:cNvPr id="11" name="TextBox 10"/>
-          <p:cNvSpPr txBox="1"/>
-          <p:nvPr/>
-        </p:nvSpPr>
-        <p:spPr>
-          <a:xfrm>
-            <a:off x="585216" y="3035808"/>
-            <a:ext cx="320040" cy="384048"/>
-          </a:xfrm>
-          <a:prstGeom prst="rect">
-            <a:avLst/>
-          </a:prstGeom>
-          <a:noFill/>
-        </p:spPr>
-        <p:txBody>
-          <a:bodyPr wrap="square">
-            <a:spAutoFit/>
-          </a:bodyPr>
-          <a:lstStyle/>
-          <a:p>
-            <a:pPr algn="ctr"/>
-            <a:r>
-              <a:rPr sz="1700" b="1" i="0">
-                <a:solidFill>
-                  <a:srgbClr val="0F2B46"/>
-                </a:solidFill>
-              </a:rPr>
-              <a:t>3</a:t>
-            </a:r>
-          </a:p>
-        </p:txBody>
-      </p:sp>
-      <p:sp>
-        <p:nvSpPr>
-          <p:cNvPr id="12" name="TextBox 11"/>
-          <p:cNvSpPr txBox="1"/>
-          <p:nvPr/>
-        </p:nvSpPr>
-        <p:spPr>
-          <a:xfrm>
-            <a:off x="1051560" y="3008376"/>
-            <a:ext cx="10515600" cy="502920"/>
-          </a:xfrm>
-          <a:prstGeom prst="rect">
-            <a:avLst/>
-          </a:prstGeom>
-          <a:noFill/>
-        </p:spPr>
-        <p:txBody>
-          <a:bodyPr wrap="square">
-            <a:spAutoFit/>
-          </a:bodyPr>
-          <a:lstStyle/>
-          <a:p>
-            <a:r>
-              <a:rPr b="1" sz="2000">
-                <a:solidFill>
-                  <a:srgbClr val="FFFFFF"/>
-                </a:solidFill>
-              </a:rPr>
-              <a:t>Structured-output reliability  </a:t>
-            </a:r>
-            <a:r>
-              <a:rPr sz="1800">
-                <a:solidFill>
-                  <a:srgbClr val="F4F6F8"/>
-                </a:solidFill>
-              </a:rPr>
-              <a:t>— JSON / schema parses cleanly without retry</a:t>
-            </a:r>
-          </a:p>
-        </p:txBody>
-      </p:sp>
-      <p:sp>
-        <p:nvSpPr>
-          <p:cNvPr id="13" name="Oval 12"/>
-          <p:cNvSpPr/>
-          <p:nvPr/>
-        </p:nvSpPr>
-        <p:spPr>
-          <a:xfrm>
-            <a:off x="548640" y="3986784"/>
-            <a:ext cx="384048" cy="384048"/>
-          </a:xfrm>
-          <a:prstGeom prst="ellipse">
-            <a:avLst/>
-          </a:prstGeom>
-          <a:solidFill>
-            <a:srgbClr val="009EB5"/>
-          </a:solidFill>
-          <a:ln>
-            <a:noFill/>
-          </a:ln>
-        </p:spPr>
-        <p:style>
-          <a:lnRef idx="1">
-            <a:schemeClr val="accent1"/>
-          </a:lnRef>
-          <a:fillRef idx="3">
-            <a:schemeClr val="accent1"/>
-          </a:fillRef>
-          <a:effectRef idx="2">
-            <a:schemeClr val="accent1"/>
-          </a:effectRef>
-          <a:fontRef idx="minor">
-            <a:schemeClr val="lt1"/>
-          </a:fontRef>
-        </p:style>
-        <p:txBody>
-          <a:bodyPr rtlCol="0" anchor="ctr"/>
-          <a:lstStyle/>
-          <a:p>
-            <a:pPr algn="ctr"/>
-          </a:p>
-        </p:txBody>
-      </p:sp>
-      <p:sp>
-        <p:nvSpPr>
-          <p:cNvPr id="14" name="TextBox 13"/>
-          <p:cNvSpPr txBox="1"/>
-          <p:nvPr/>
-        </p:nvSpPr>
-        <p:spPr>
-          <a:xfrm>
-            <a:off x="585216" y="3968496"/>
-            <a:ext cx="320040" cy="384048"/>
-          </a:xfrm>
-          <a:prstGeom prst="rect">
-            <a:avLst/>
-          </a:prstGeom>
-          <a:noFill/>
-        </p:spPr>
-        <p:txBody>
-          <a:bodyPr wrap="square">
-            <a:spAutoFit/>
-          </a:bodyPr>
-          <a:lstStyle/>
-          <a:p>
-            <a:pPr algn="ctr"/>
-            <a:r>
-              <a:rPr sz="1700" b="1" i="0">
-                <a:solidFill>
-                  <a:srgbClr val="0F2B46"/>
-                </a:solidFill>
-              </a:rPr>
-              <a:t>4</a:t>
-            </a:r>
-          </a:p>
-        </p:txBody>
-      </p:sp>
-      <p:sp>
-        <p:nvSpPr>
-          <p:cNvPr id="15" name="TextBox 14"/>
-          <p:cNvSpPr txBox="1"/>
-          <p:nvPr/>
-        </p:nvSpPr>
-        <p:spPr>
-          <a:xfrm>
-            <a:off x="1051560" y="3941064"/>
-            <a:ext cx="10515600" cy="502920"/>
-          </a:xfrm>
-          <a:prstGeom prst="rect">
-            <a:avLst/>
-          </a:prstGeom>
-          <a:noFill/>
-        </p:spPr>
-        <p:txBody>
-          <a:bodyPr wrap="square">
-            <a:spAutoFit/>
-          </a:bodyPr>
-          <a:lstStyle/>
-          <a:p>
-            <a:r>
-              <a:rPr b="1" sz="2000">
-                <a:solidFill>
-                  <a:srgbClr val="FFFFFF"/>
-                </a:solidFill>
-              </a:rPr>
-              <a:t>Latency at your percentile  </a:t>
-            </a:r>
-            <a:r>
-              <a:rPr sz="1800">
-                <a:solidFill>
-                  <a:srgbClr val="F4F6F8"/>
-                </a:solidFill>
-              </a:rPr>
-              <a:t>— P95/P99 under realistic concurrency — not average</a:t>
-            </a:r>
-          </a:p>
-        </p:txBody>
-      </p:sp>
-      <p:sp>
-        <p:nvSpPr>
-          <p:cNvPr id="16" name="Oval 15"/>
-          <p:cNvSpPr/>
-          <p:nvPr/>
-        </p:nvSpPr>
-        <p:spPr>
-          <a:xfrm>
-            <a:off x="548640" y="4919472"/>
-            <a:ext cx="384048" cy="384048"/>
-          </a:xfrm>
-          <a:prstGeom prst="ellipse">
-            <a:avLst/>
-          </a:prstGeom>
-          <a:solidFill>
-            <a:srgbClr val="009EB5"/>
-          </a:solidFill>
-          <a:ln>
-            <a:noFill/>
-          </a:ln>
-        </p:spPr>
-        <p:style>
-          <a:lnRef idx="1">
-            <a:schemeClr val="accent1"/>
-          </a:lnRef>
-          <a:fillRef idx="3">
-            <a:schemeClr val="accent1"/>
-          </a:fillRef>
-          <a:effectRef idx="2">
-            <a:schemeClr val="accent1"/>
-          </a:effectRef>
-          <a:fontRef idx="minor">
-            <a:schemeClr val="lt1"/>
-          </a:fontRef>
-        </p:style>
-        <p:txBody>
-          <a:bodyPr rtlCol="0" anchor="ctr"/>
-          <a:lstStyle/>
-          <a:p>
-            <a:pPr algn="ctr"/>
-          </a:p>
-        </p:txBody>
-      </p:sp>
-      <p:sp>
-        <p:nvSpPr>
-          <p:cNvPr id="17" name="TextBox 16"/>
-          <p:cNvSpPr txBox="1"/>
-          <p:nvPr/>
-        </p:nvSpPr>
-        <p:spPr>
-          <a:xfrm>
-            <a:off x="585216" y="4901184"/>
-            <a:ext cx="320040" cy="384048"/>
-          </a:xfrm>
-          <a:prstGeom prst="rect">
-            <a:avLst/>
-          </a:prstGeom>
-          <a:noFill/>
-        </p:spPr>
-        <p:txBody>
-          <a:bodyPr wrap="square">
-            <a:spAutoFit/>
-          </a:bodyPr>
-          <a:lstStyle/>
-          <a:p>
-            <a:pPr algn="ctr"/>
-            <a:r>
-              <a:rPr sz="1700" b="1" i="0">
-                <a:solidFill>
-                  <a:srgbClr val="0F2B46"/>
-                </a:solidFill>
-              </a:rPr>
-              <a:t>5</a:t>
-            </a:r>
-          </a:p>
-        </p:txBody>
-      </p:sp>
-      <p:sp>
-        <p:nvSpPr>
-          <p:cNvPr id="18" name="TextBox 17"/>
-          <p:cNvSpPr txBox="1"/>
-          <p:nvPr/>
-        </p:nvSpPr>
-        <p:spPr>
-          <a:xfrm>
-            <a:off x="1051560" y="4873752"/>
-            <a:ext cx="10515600" cy="502920"/>
-          </a:xfrm>
-          <a:prstGeom prst="rect">
-            <a:avLst/>
-          </a:prstGeom>
-          <a:noFill/>
-        </p:spPr>
-        <p:txBody>
-          <a:bodyPr wrap="square">
-            <a:spAutoFit/>
-          </a:bodyPr>
-          <a:lstStyle/>
-          <a:p>
-            <a:r>
-              <a:rPr b="1" sz="2000">
-                <a:solidFill>
-                  <a:srgbClr val="FFFFFF"/>
-                </a:solidFill>
-              </a:rPr>
-              <a:t>Cost-per-task  </a:t>
-            </a:r>
-            <a:r>
-              <a:rPr sz="1800">
-                <a:solidFill>
-                  <a:srgbClr val="F4F6F8"/>
-                </a:solidFill>
-              </a:rPr>
-              <a:t>— True cost per workload unit, including retries + caching</a:t>
-            </a:r>
-          </a:p>
-        </p:txBody>
-      </p:sp>
-    </p:spTree>
-  </p:cSld>
-  <p:clrMapOvr>
-    <a:masterClrMapping/>
-  </p:clrMapOvr>
-</p:sld>
-</file>
-
-<file path=ppt/slides/slide6.xml><?xml version="1.0" encoding="utf-8"?>
-<p:sld xmlns:a="http://schemas.openxmlformats.org/drawingml/2006/main" xmlns:p="http://schemas.openxmlformats.org/presentationml/2006/main" xmlns:r="http://schemas.openxmlformats.org/officeDocument/2006/relationships">
-  <p:cSld>
-    <p:bg>
-      <p:bgPr>
-        <a:solidFill>
-          <a:srgbClr val="0F2B46"/>
-        </a:solidFill>
-        <a:effectLst/>
-      </p:bgPr>
-    </p:bg>
-    <p:spTree>
-      <p:nvGrpSpPr>
-        <p:cNvPr id="1" name=""/>
-        <p:cNvGrpSpPr/>
-        <p:nvPr/>
-      </p:nvGrpSpPr>
-      <p:grpSpPr/>
-      <p:sp>
-        <p:nvSpPr>
-          <p:cNvPr id="2" name="TextBox 1"/>
-          <p:cNvSpPr txBox="1"/>
-          <p:nvPr/>
-        </p:nvSpPr>
-        <p:spPr>
-          <a:xfrm>
-            <a:off x="548640" y="320040"/>
-            <a:ext cx="11064240" cy="731520"/>
-          </a:xfrm>
-          <a:prstGeom prst="rect">
-            <a:avLst/>
-          </a:prstGeom>
-          <a:noFill/>
-        </p:spPr>
-        <p:txBody>
-          <a:bodyPr wrap="square">
-            <a:spAutoFit/>
-          </a:bodyPr>
-          <a:lstStyle/>
-          <a:p>
-            <a:pPr algn="l"/>
-            <a:r>
-              <a:rPr sz="3400" b="1" i="0">
-                <a:solidFill>
-                  <a:srgbClr val="009EB5"/>
-                </a:solidFill>
-              </a:rPr>
-              <a:t>Dimension 1: Tool-use determinism</a:t>
-            </a:r>
-          </a:p>
-        </p:txBody>
-      </p:sp>
-      <p:sp>
-        <p:nvSpPr>
-          <p:cNvPr id="3" name="Rectangle 2"/>
-          <p:cNvSpPr/>
-          <p:nvPr/>
-        </p:nvSpPr>
-        <p:spPr>
-          <a:xfrm>
-            <a:off x="548640" y="1097280"/>
-            <a:ext cx="11064240" cy="27432"/>
-          </a:xfrm>
-          <a:prstGeom prst="rect">
-            <a:avLst/>
-          </a:prstGeom>
-          <a:solidFill>
-            <a:srgbClr val="009EB5"/>
-          </a:solidFill>
-          <a:ln>
-            <a:noFill/>
-          </a:ln>
-        </p:spPr>
-        <p:style>
-          <a:lnRef idx="1">
-            <a:schemeClr val="accent1"/>
-          </a:lnRef>
-          <a:fillRef idx="3">
-            <a:schemeClr val="accent1"/>
-          </a:fillRef>
-          <a:effectRef idx="2">
-            <a:schemeClr val="accent1"/>
-          </a:effectRef>
-          <a:fontRef idx="minor">
-            <a:schemeClr val="lt1"/>
-          </a:fontRef>
-        </p:style>
-        <p:txBody>
-          <a:bodyPr rtlCol="0" anchor="ctr"/>
-          <a:lstStyle/>
-          <a:p>
-            <a:pPr algn="ctr"/>
-          </a:p>
-        </p:txBody>
-      </p:sp>
-      <p:sp>
-        <p:nvSpPr>
-          <p:cNvPr id="4" name="TextBox 3"/>
-          <p:cNvSpPr txBox="1"/>
-          <p:nvPr/>
-        </p:nvSpPr>
-        <p:spPr>
-          <a:xfrm>
-            <a:off x="777240" y="1280160"/>
-            <a:ext cx="10607040" cy="548640"/>
-          </a:xfrm>
-          <a:prstGeom prst="rect">
-            <a:avLst/>
-          </a:prstGeom>
-          <a:noFill/>
-        </p:spPr>
-        <p:txBody>
-          <a:bodyPr wrap="square">
-            <a:spAutoFit/>
-          </a:bodyPr>
-          <a:lstStyle/>
-          <a:p>
-            <a:r>
-              <a:rPr sz="2000">
-                <a:solidFill>
-                  <a:srgbClr val="FFFFFF"/>
-                </a:solidFill>
-              </a:rPr>
-              <a:t>▸  P(structurally equivalent output | same prompt, same temperature) across runs</a:t>
-            </a:r>
-          </a:p>
-        </p:txBody>
-      </p:sp>
-      <p:sp>
-        <p:nvSpPr>
-          <p:cNvPr id="5" name="TextBox 4"/>
-          <p:cNvSpPr txBox="1"/>
-          <p:nvPr/>
-        </p:nvSpPr>
-        <p:spPr>
-          <a:xfrm>
-            <a:off x="777240" y="1847088"/>
-            <a:ext cx="10607040" cy="548640"/>
-          </a:xfrm>
-          <a:prstGeom prst="rect">
-            <a:avLst/>
-          </a:prstGeom>
-          <a:noFill/>
-        </p:spPr>
-        <p:txBody>
-          <a:bodyPr wrap="square">
-            <a:spAutoFit/>
-          </a:bodyPr>
-          <a:lstStyle/>
-          <a:p>
-            <a:r>
-              <a:rPr sz="2000">
-                <a:solidFill>
-                  <a:srgbClr val="FFFFFF"/>
-                </a:solidFill>
-              </a:rPr>
-              <a:t>▸  A 3-step pipeline at 90% stability each → 73% end-to-end success</a:t>
-            </a:r>
-          </a:p>
-        </p:txBody>
-      </p:sp>
-      <p:sp>
-        <p:nvSpPr>
-          <p:cNvPr id="6" name="TextBox 5"/>
-          <p:cNvSpPr txBox="1"/>
-          <p:nvPr/>
-        </p:nvSpPr>
-        <p:spPr>
-          <a:xfrm>
-            <a:off x="777240" y="2414016"/>
-            <a:ext cx="10607040" cy="548640"/>
-          </a:xfrm>
-          <a:prstGeom prst="rect">
-            <a:avLst/>
-          </a:prstGeom>
-          <a:noFill/>
-        </p:spPr>
-        <p:txBody>
-          <a:bodyPr wrap="square">
-            <a:spAutoFit/>
-          </a:bodyPr>
-          <a:lstStyle/>
-          <a:p>
-            <a:r>
-              <a:rPr sz="2000">
-                <a:solidFill>
-                  <a:srgbClr val="FFFFFF"/>
-                </a:solidFill>
-              </a:rPr>
-              <a:t>▸  A 5-step pipeline at 90% stability each → 59% end-to-end success</a:t>
-            </a:r>
-          </a:p>
-        </p:txBody>
-      </p:sp>
-      <p:sp>
-        <p:nvSpPr>
-          <p:cNvPr id="7" name="TextBox 6"/>
-          <p:cNvSpPr txBox="1"/>
-          <p:nvPr/>
-        </p:nvSpPr>
-        <p:spPr>
-          <a:xfrm>
-            <a:off x="777240" y="2980944"/>
-            <a:ext cx="10607040" cy="548640"/>
-          </a:xfrm>
-          <a:prstGeom prst="rect">
-            <a:avLst/>
-          </a:prstGeom>
-          <a:noFill/>
-        </p:spPr>
-        <p:txBody>
-          <a:bodyPr wrap="square">
-            <a:spAutoFit/>
-          </a:bodyPr>
-          <a:lstStyle/>
-          <a:p>
-            <a:r>
-              <a:rPr sz="2000">
-                <a:solidFill>
-                  <a:srgbClr val="FFFFFF"/>
-                </a:solidFill>
-              </a:rPr>
-              <a:t>▸  Determinism is the foundational metric for any agentic workload</a:t>
-            </a:r>
-          </a:p>
-        </p:txBody>
-      </p:sp>
-      <p:sp>
-        <p:nvSpPr>
-          <p:cNvPr id="8" name="TextBox 7"/>
-          <p:cNvSpPr txBox="1"/>
-          <p:nvPr/>
-        </p:nvSpPr>
-        <p:spPr>
-          <a:xfrm>
-            <a:off x="777240" y="3547872"/>
-            <a:ext cx="10607040" cy="548640"/>
-          </a:xfrm>
-          <a:prstGeom prst="rect">
-            <a:avLst/>
-          </a:prstGeom>
-          <a:noFill/>
-        </p:spPr>
-        <p:txBody>
-          <a:bodyPr wrap="square">
-            <a:spAutoFit/>
-          </a:bodyPr>
-          <a:lstStyle/>
-          <a:p>
-            <a:r>
-              <a:rPr sz="2000">
-                <a:solidFill>
-                  <a:srgbClr val="FFFFFF"/>
-                </a:solidFill>
-              </a:rPr>
-              <a:t>▸  Not measured by any major public benchmark as of Q2 2026</a:t>
-            </a:r>
-          </a:p>
-        </p:txBody>
-      </p:sp>
-      <p:sp>
-        <p:nvSpPr>
-          <p:cNvPr id="9" name="TextBox 8"/>
-          <p:cNvSpPr txBox="1"/>
-          <p:nvPr/>
-        </p:nvSpPr>
-        <p:spPr>
-          <a:xfrm>
-            <a:off x="548640" y="6309360"/>
-            <a:ext cx="11064240" cy="365760"/>
-          </a:xfrm>
-          <a:prstGeom prst="rect">
-            <a:avLst/>
-          </a:prstGeom>
-          <a:noFill/>
-        </p:spPr>
-        <p:txBody>
-          <a:bodyPr wrap="square">
-            <a:spAutoFit/>
-          </a:bodyPr>
-          <a:lstStyle/>
-          <a:p>
-            <a:pPr algn="l"/>
-            <a:r>
-              <a:rPr sz="1300" b="0" i="1">
-                <a:solidFill>
-                  <a:srgbClr val="009EB5"/>
-                </a:solidFill>
-              </a:rPr>
-              <a:t>Covered in depth in Chapter 2  ·  Our 10×3×5 dataset fills the gap</a:t>
-            </a:r>
-          </a:p>
-        </p:txBody>
-      </p:sp>
-    </p:spTree>
-  </p:cSld>
-  <p:clrMapOvr>
-    <a:masterClrMapping/>
-  </p:clrMapOvr>
-</p:sld>
-</file>
-
-<file path=ppt/slides/slide7.xml><?xml version="1.0" encoding="utf-8"?>
-<p:sld xmlns:a="http://schemas.openxmlformats.org/drawingml/2006/main" xmlns:p="http://schemas.openxmlformats.org/presentationml/2006/main" xmlns:r="http://schemas.openxmlformats.org/officeDocument/2006/relationships">
-  <p:cSld>
-    <p:bg>
-      <p:bgPr>
-        <a:solidFill>
-          <a:srgbClr val="0F2B46"/>
-        </a:solidFill>
-        <a:effectLst/>
-      </p:bgPr>
-    </p:bg>
-    <p:spTree>
-      <p:nvGrpSpPr>
-        <p:cNvPr id="1" name=""/>
-        <p:cNvGrpSpPr/>
-        <p:nvPr/>
-      </p:nvGrpSpPr>
-      <p:grpSpPr/>
-      <p:sp>
-        <p:nvSpPr>
-          <p:cNvPr id="2" name="TextBox 1"/>
-          <p:cNvSpPr txBox="1"/>
-          <p:nvPr/>
-        </p:nvSpPr>
-        <p:spPr>
-          <a:xfrm>
-            <a:off x="548640" y="320040"/>
-            <a:ext cx="11064240" cy="731520"/>
-          </a:xfrm>
-          <a:prstGeom prst="rect">
-            <a:avLst/>
-          </a:prstGeom>
-          <a:noFill/>
-        </p:spPr>
-        <p:txBody>
-          <a:bodyPr wrap="square">
-            <a:spAutoFit/>
-          </a:bodyPr>
-          <a:lstStyle/>
-          <a:p>
-            <a:pPr algn="l"/>
-            <a:r>
-              <a:rPr sz="3400" b="1" i="0">
-                <a:solidFill>
-                  <a:srgbClr val="009EB5"/>
-                </a:solidFill>
-              </a:rPr>
-              <a:t>Dimension 2: Context fidelity at depth</a:t>
-            </a:r>
-          </a:p>
-        </p:txBody>
-      </p:sp>
-      <p:sp>
-        <p:nvSpPr>
-          <p:cNvPr id="3" name="Rectangle 2"/>
-          <p:cNvSpPr/>
-          <p:nvPr/>
-        </p:nvSpPr>
-        <p:spPr>
-          <a:xfrm>
-            <a:off x="548640" y="1097280"/>
-            <a:ext cx="11064240" cy="27432"/>
-          </a:xfrm>
-          <a:prstGeom prst="rect">
-            <a:avLst/>
-          </a:prstGeom>
-          <a:solidFill>
-            <a:srgbClr val="009EB5"/>
-          </a:solidFill>
-          <a:ln>
-            <a:noFill/>
-          </a:ln>
-        </p:spPr>
-        <p:style>
-          <a:lnRef idx="1">
-            <a:schemeClr val="accent1"/>
-          </a:lnRef>
-          <a:fillRef idx="3">
-            <a:schemeClr val="accent1"/>
-          </a:fillRef>
-          <a:effectRef idx="2">
-            <a:schemeClr val="accent1"/>
-          </a:effectRef>
-          <a:fontRef idx="minor">
-            <a:schemeClr val="lt1"/>
-          </a:fontRef>
-        </p:style>
-        <p:txBody>
-          <a:bodyPr rtlCol="0" anchor="ctr"/>
-          <a:lstStyle/>
-          <a:p>
-            <a:pPr algn="ctr"/>
-          </a:p>
-        </p:txBody>
-      </p:sp>
-      <p:sp>
-        <p:nvSpPr>
-          <p:cNvPr id="4" name="TextBox 3"/>
-          <p:cNvSpPr txBox="1"/>
-          <p:nvPr/>
-        </p:nvSpPr>
-        <p:spPr>
-          <a:xfrm>
-            <a:off x="777240" y="1280160"/>
-            <a:ext cx="10607040" cy="548640"/>
-          </a:xfrm>
-          <a:prstGeom prst="rect">
-            <a:avLst/>
-          </a:prstGeom>
-          <a:noFill/>
-        </p:spPr>
-        <p:txBody>
-          <a:bodyPr wrap="square">
-            <a:spAutoFit/>
-          </a:bodyPr>
-          <a:lstStyle/>
-          <a:p>
-            <a:r>
-              <a:rPr sz="2000">
-                <a:solidFill>
-                  <a:srgbClr val="FFFFFF"/>
-                </a:solidFill>
-              </a:rPr>
-              <a:t>▸  All frontier models show 'lost-in-the-middle' accuracy degradation</a:t>
-            </a:r>
-          </a:p>
-        </p:txBody>
-      </p:sp>
-      <p:sp>
-        <p:nvSpPr>
-          <p:cNvPr id="5" name="TextBox 4"/>
-          <p:cNvSpPr txBox="1"/>
-          <p:nvPr/>
-        </p:nvSpPr>
-        <p:spPr>
-          <a:xfrm>
-            <a:off x="777240" y="1847088"/>
-            <a:ext cx="10607040" cy="548640"/>
-          </a:xfrm>
-          <a:prstGeom prst="rect">
-            <a:avLst/>
-          </a:prstGeom>
-          <a:noFill/>
-        </p:spPr>
-        <p:txBody>
-          <a:bodyPr wrap="square">
-            <a:spAutoFit/>
-          </a:bodyPr>
-          <a:lstStyle/>
-          <a:p>
-            <a:r>
-              <a:rPr sz="2000">
-                <a:solidFill>
-                  <a:srgbClr val="FFFFFF"/>
-                </a:solidFill>
-              </a:rPr>
-              <a:t>▸  Opus 4.7: 200K context window  ·  Gemini 3.1 Pro: 1M context window</a:t>
-            </a:r>
-          </a:p>
-        </p:txBody>
-      </p:sp>
-      <p:sp>
-        <p:nvSpPr>
-          <p:cNvPr id="6" name="TextBox 5"/>
-          <p:cNvSpPr txBox="1"/>
-          <p:nvPr/>
-        </p:nvSpPr>
-        <p:spPr>
-          <a:xfrm>
-            <a:off x="777240" y="2414016"/>
-            <a:ext cx="10607040" cy="548640"/>
-          </a:xfrm>
-          <a:prstGeom prst="rect">
-            <a:avLst/>
-          </a:prstGeom>
-          <a:noFill/>
-        </p:spPr>
-        <p:txBody>
-          <a:bodyPr wrap="square">
-            <a:spAutoFit/>
-          </a:bodyPr>
-          <a:lstStyle/>
-          <a:p>
-            <a:r>
-              <a:rPr sz="2000">
-                <a:solidFill>
-                  <a:srgbClr val="FFFFFF"/>
-                </a:solidFill>
-              </a:rPr>
-              <a:t>▸  The question: how reliably does the model retrieve at different positions?</a:t>
-            </a:r>
-          </a:p>
-        </p:txBody>
-      </p:sp>
-      <p:sp>
-        <p:nvSpPr>
-          <p:cNvPr id="7" name="TextBox 6"/>
-          <p:cNvSpPr txBox="1"/>
-          <p:nvPr/>
-        </p:nvSpPr>
-        <p:spPr>
-          <a:xfrm>
-            <a:off x="777240" y="2980944"/>
-            <a:ext cx="10607040" cy="548640"/>
-          </a:xfrm>
-          <a:prstGeom prst="rect">
-            <a:avLst/>
-          </a:prstGeom>
-          <a:noFill/>
-        </p:spPr>
-        <p:txBody>
-          <a:bodyPr wrap="square">
-            <a:spAutoFit/>
-          </a:bodyPr>
-          <a:lstStyle/>
-          <a:p>
-            <a:r>
-              <a:rPr sz="2000">
-                <a:solidFill>
-                  <a:srgbClr val="FFFFFF"/>
-                </a:solidFill>
-              </a:rPr>
-              <a:t>▸  Empirical retrieval at 80% of advertised limit ≠ published context size</a:t>
-            </a:r>
-          </a:p>
-        </p:txBody>
-      </p:sp>
-      <p:sp>
-        <p:nvSpPr>
-          <p:cNvPr id="8" name="TextBox 7"/>
-          <p:cNvSpPr txBox="1"/>
-          <p:nvPr/>
-        </p:nvSpPr>
-        <p:spPr>
-          <a:xfrm>
-            <a:off x="777240" y="3547872"/>
-            <a:ext cx="10607040" cy="548640"/>
-          </a:xfrm>
-          <a:prstGeom prst="rect">
-            <a:avLst/>
-          </a:prstGeom>
-          <a:noFill/>
-        </p:spPr>
-        <p:txBody>
-          <a:bodyPr wrap="square">
-            <a:spAutoFit/>
-          </a:bodyPr>
-          <a:lstStyle/>
-          <a:p>
-            <a:r>
-              <a:rPr sz="2000">
-                <a:solidFill>
-                  <a:srgbClr val="FFFFFF"/>
-                </a:solidFill>
-              </a:rPr>
-              <a:t>▸  Chapter 3 benchmarks this across all three models</a:t>
-            </a:r>
-          </a:p>
-        </p:txBody>
-      </p:sp>
-    </p:spTree>
-  </p:cSld>
-  <p:clrMapOvr>
-    <a:masterClrMapping/>
-  </p:clrMapOvr>
-</p:sld>
-</file>
-
-<file path=ppt/slides/slide8.xml><?xml version="1.0" encoding="utf-8"?>
-<p:sld xmlns:a="http://schemas.openxmlformats.org/drawingml/2006/main" xmlns:p="http://schemas.openxmlformats.org/presentationml/2006/main" xmlns:r="http://schemas.openxmlformats.org/officeDocument/2006/relationships">
-  <p:cSld>
-    <p:bg>
-      <p:bgPr>
-        <a:solidFill>
-          <a:srgbClr val="0F2B46"/>
-        </a:solidFill>
-        <a:effectLst/>
-      </p:bgPr>
-    </p:bg>
-    <p:spTree>
-      <p:nvGrpSpPr>
-        <p:cNvPr id="1" name=""/>
-        <p:cNvGrpSpPr/>
-        <p:nvPr/>
-      </p:nvGrpSpPr>
-      <p:grpSpPr/>
-      <p:sp>
-        <p:nvSpPr>
-          <p:cNvPr id="2" name="TextBox 1"/>
-          <p:cNvSpPr txBox="1"/>
-          <p:nvPr/>
-        </p:nvSpPr>
-        <p:spPr>
-          <a:xfrm>
-            <a:off x="548640" y="320040"/>
-            <a:ext cx="11064240" cy="731520"/>
-          </a:xfrm>
-          <a:prstGeom prst="rect">
-            <a:avLst/>
-          </a:prstGeom>
-          <a:noFill/>
-        </p:spPr>
-        <p:txBody>
-          <a:bodyPr wrap="square">
-            <a:spAutoFit/>
-          </a:bodyPr>
-          <a:lstStyle/>
-          <a:p>
-            <a:pPr algn="l"/>
-            <a:r>
-              <a:rPr sz="3400" b="1" i="0">
-                <a:solidFill>
-                  <a:srgbClr val="009EB5"/>
-                </a:solidFill>
-              </a:rPr>
-              <a:t>Dimension 3: Structured-output reliability</a:t>
-            </a:r>
-          </a:p>
-        </p:txBody>
-      </p:sp>
-      <p:sp>
-        <p:nvSpPr>
-          <p:cNvPr id="3" name="Rectangle 2"/>
-          <p:cNvSpPr/>
-          <p:nvPr/>
-        </p:nvSpPr>
-        <p:spPr>
-          <a:xfrm>
-            <a:off x="548640" y="1097280"/>
-            <a:ext cx="11064240" cy="27432"/>
-          </a:xfrm>
-          <a:prstGeom prst="rect">
-            <a:avLst/>
-          </a:prstGeom>
-          <a:solidFill>
-            <a:srgbClr val="009EB5"/>
-          </a:solidFill>
-          <a:ln>
-            <a:noFill/>
-          </a:ln>
-        </p:spPr>
-        <p:style>
-          <a:lnRef idx="1">
-            <a:schemeClr val="accent1"/>
-          </a:lnRef>
-          <a:fillRef idx="3">
-            <a:schemeClr val="accent1"/>
-          </a:fillRef>
-          <a:effectRef idx="2">
-            <a:schemeClr val="accent1"/>
-          </a:effectRef>
-          <a:fontRef idx="minor">
-            <a:schemeClr val="lt1"/>
-          </a:fontRef>
-        </p:style>
-        <p:txBody>
-          <a:bodyPr rtlCol="0" anchor="ctr"/>
-          <a:lstStyle/>
-          <a:p>
-            <a:pPr algn="ctr"/>
-          </a:p>
-        </p:txBody>
-      </p:sp>
-      <p:sp>
-        <p:nvSpPr>
-          <p:cNvPr id="4" name="TextBox 3"/>
-          <p:cNvSpPr txBox="1"/>
-          <p:nvPr/>
-        </p:nvSpPr>
-        <p:spPr>
-          <a:xfrm>
-            <a:off x="777240" y="1280160"/>
-            <a:ext cx="10607040" cy="548640"/>
-          </a:xfrm>
-          <a:prstGeom prst="rect">
-            <a:avLst/>
-          </a:prstGeom>
-          <a:noFill/>
-        </p:spPr>
-        <p:txBody>
-          <a:bodyPr wrap="square">
-            <a:spAutoFit/>
-          </a:bodyPr>
-          <a:lstStyle/>
-          <a:p>
-            <a:r>
-              <a:rPr sz="2000">
-                <a:solidFill>
-                  <a:srgbClr val="FFFFFF"/>
-                </a:solidFill>
-              </a:rPr>
-              <a:t>▸  Fraction of responses that parse as valid JSON without retry/post-processing</a:t>
-            </a:r>
-          </a:p>
-        </p:txBody>
-      </p:sp>
-      <p:sp>
-        <p:nvSpPr>
-          <p:cNvPr id="5" name="TextBox 4"/>
-          <p:cNvSpPr txBox="1"/>
-          <p:nvPr/>
-        </p:nvSpPr>
-        <p:spPr>
-          <a:xfrm>
-            <a:off x="777240" y="1847088"/>
-            <a:ext cx="10607040" cy="548640"/>
-          </a:xfrm>
-          <a:prstGeom prst="rect">
-            <a:avLst/>
-          </a:prstGeom>
-          <a:noFill/>
-        </p:spPr>
-        <p:txBody>
-          <a:bodyPr wrap="square">
-            <a:spAutoFit/>
-          </a:bodyPr>
-          <a:lstStyle/>
-          <a:p>
-            <a:r>
-              <a:rPr sz="2000">
-                <a:solidFill>
-                  <a:srgbClr val="FFFFFF"/>
-                </a:solidFill>
-              </a:rPr>
-              <a:t>▸  Distinct from determinism: can be consistent yet still malform JSON on 5% of calls</a:t>
-            </a:r>
-          </a:p>
-        </p:txBody>
-      </p:sp>
-      <p:sp>
-        <p:nvSpPr>
-          <p:cNvPr id="6" name="TextBox 5"/>
-          <p:cNvSpPr txBox="1"/>
-          <p:nvPr/>
-        </p:nvSpPr>
-        <p:spPr>
-          <a:xfrm>
-            <a:off x="777240" y="2414016"/>
-            <a:ext cx="10607040" cy="548640"/>
-          </a:xfrm>
-          <a:prstGeom prst="rect">
-            <a:avLst/>
-          </a:prstGeom>
-          <a:noFill/>
-        </p:spPr>
-        <p:txBody>
-          <a:bodyPr wrap="square">
-            <a:spAutoFit/>
-          </a:bodyPr>
-          <a:lstStyle/>
-          <a:p>
-            <a:r>
-              <a:rPr sz="2000">
-                <a:solidFill>
-                  <a:srgbClr val="FFFFFF"/>
-                </a:solidFill>
-              </a:rPr>
-              <a:t>▸  Malformed output propagates silently through downstream pipelines</a:t>
-            </a:r>
-          </a:p>
-        </p:txBody>
-      </p:sp>
-      <p:sp>
-        <p:nvSpPr>
-          <p:cNvPr id="7" name="TextBox 6"/>
-          <p:cNvSpPr txBox="1"/>
-          <p:nvPr/>
-        </p:nvSpPr>
-        <p:spPr>
-          <a:xfrm>
-            <a:off x="777240" y="2980944"/>
-            <a:ext cx="10607040" cy="548640"/>
-          </a:xfrm>
-          <a:prstGeom prst="rect">
-            <a:avLst/>
-          </a:prstGeom>
-          <a:noFill/>
-        </p:spPr>
-        <p:txBody>
-          <a:bodyPr wrap="square">
-            <a:spAutoFit/>
-          </a:bodyPr>
-          <a:lstStyle/>
-          <a:p>
-            <a:r>
-              <a:rPr sz="2000">
-                <a:solidFill>
-                  <a:srgbClr val="FFFFFF"/>
-                </a:solidFill>
-              </a:rPr>
-              <a:t>▸  High reliability → lower retry costs, simpler error handling</a:t>
-            </a:r>
-          </a:p>
-        </p:txBody>
-      </p:sp>
-      <p:sp>
-        <p:nvSpPr>
-          <p:cNvPr id="8" name="TextBox 7"/>
-          <p:cNvSpPr txBox="1"/>
-          <p:nvPr/>
-        </p:nvSpPr>
-        <p:spPr>
-          <a:xfrm>
-            <a:off x="777240" y="3547872"/>
-            <a:ext cx="10607040" cy="548640"/>
-          </a:xfrm>
-          <a:prstGeom prst="rect">
-            <a:avLst/>
-          </a:prstGeom>
-          <a:noFill/>
-        </p:spPr>
-        <p:txBody>
-          <a:bodyPr wrap="square">
-            <a:spAutoFit/>
-          </a:bodyPr>
-          <a:lstStyle/>
-          <a:p>
-            <a:r>
-              <a:rPr sz="2000">
-                <a:solidFill>
-                  <a:srgbClr val="FFFFFF"/>
-                </a:solidFill>
-              </a:rPr>
-              <a:t>▸  Our benchmark: output structure variance ranged 2%–18% at temperature=0</a:t>
+              <a:t>academy.kspl.tech | Koenig AI Academy</a:t>
             </a:r>
           </a:p>
         </p:txBody>
@@ -7193,7 +5063,7 @@
     <p:bg>
       <p:bgPr>
         <a:solidFill>
-          <a:srgbClr val="0F2B46"/>
+          <a:srgbClr val="18181B"/>
         </a:solidFill>
         <a:effectLst/>
       </p:bgPr>
@@ -7213,8 +5083,8 @@
         </p:nvSpPr>
         <p:spPr>
           <a:xfrm>
-            <a:off x="548640" y="320040"/>
-            <a:ext cx="11064240" cy="731520"/>
+            <a:off x="731520" y="1371600"/>
+            <a:ext cx="10698480" cy="914400"/>
           </a:xfrm>
           <a:prstGeom prst="rect">
             <a:avLst/>
@@ -7227,58 +5097,49 @@
           </a:bodyPr>
           <a:lstStyle/>
           <a:p>
-            <a:pPr algn="l"/>
-            <a:r>
-              <a:rPr sz="3400" b="1" i="0">
-                <a:solidFill>
-                  <a:srgbClr val="009EB5"/>
+            <a:pPr algn="ctr"/>
+            <a:r>
+              <a:rPr sz="3800" b="1" i="0">
+                <a:solidFill>
+                  <a:srgbClr val="FFFFFF"/>
                 </a:solidFill>
               </a:rPr>
-              <a:t>Dimension 4: Latency at your percentile</a:t>
-            </a:r>
-          </a:p>
-        </p:txBody>
-      </p:sp>
-      <p:sp>
-        <p:nvSpPr>
-          <p:cNvPr id="3" name="Rectangle 2"/>
-          <p:cNvSpPr/>
+              <a:t>Try it next →</a:t>
+            </a:r>
+          </a:p>
+        </p:txBody>
+      </p:sp>
+      <p:sp>
+        <p:nvSpPr>
+          <p:cNvPr id="3" name="TextBox 2"/>
+          <p:cNvSpPr txBox="1"/>
           <p:nvPr/>
         </p:nvSpPr>
         <p:spPr>
           <a:xfrm>
-            <a:off x="548640" y="1097280"/>
-            <a:ext cx="11064240" cy="27432"/>
-          </a:xfrm>
-          <a:prstGeom prst="rect">
-            <a:avLst/>
-          </a:prstGeom>
-          <a:solidFill>
-            <a:srgbClr val="009EB5"/>
-          </a:solidFill>
-          <a:ln>
-            <a:noFill/>
-          </a:ln>
-        </p:spPr>
-        <p:style>
-          <a:lnRef idx="1">
-            <a:schemeClr val="accent1"/>
-          </a:lnRef>
-          <a:fillRef idx="3">
-            <a:schemeClr val="accent1"/>
-          </a:fillRef>
-          <a:effectRef idx="2">
-            <a:schemeClr val="accent1"/>
-          </a:effectRef>
-          <a:fontRef idx="minor">
-            <a:schemeClr val="lt1"/>
-          </a:fontRef>
-        </p:style>
-        <p:txBody>
-          <a:bodyPr rtlCol="0" anchor="ctr"/>
+            <a:off x="731520" y="3657600"/>
+            <a:ext cx="10698480" cy="548640"/>
+          </a:xfrm>
+          <a:prstGeom prst="rect">
+            <a:avLst/>
+          </a:prstGeom>
+          <a:noFill/>
+        </p:spPr>
+        <p:txBody>
+          <a:bodyPr wrap="square">
+            <a:spAutoFit/>
+          </a:bodyPr>
           <a:lstStyle/>
           <a:p>
             <a:pPr algn="ctr"/>
+            <a:r>
+              <a:rPr sz="1600" b="0" i="0">
+                <a:solidFill>
+                  <a:srgbClr val="A1A1AA"/>
+                </a:solidFill>
+              </a:rPr>
+              <a:t>Continue learning at:</a:t>
+            </a:r>
           </a:p>
         </p:txBody>
       </p:sp>
@@ -7290,8 +5151,8 @@
         </p:nvSpPr>
         <p:spPr>
           <a:xfrm>
-            <a:off x="777240" y="1280160"/>
-            <a:ext cx="10607040" cy="548640"/>
+            <a:off x="731520" y="4297680"/>
+            <a:ext cx="10698480" cy="731520"/>
           </a:xfrm>
           <a:prstGeom prst="rect">
             <a:avLst/>
@@ -7304,13 +5165,14 @@
           </a:bodyPr>
           <a:lstStyle/>
           <a:p>
-            <a:r>
-              <a:rPr sz="2000">
-                <a:solidFill>
-                  <a:srgbClr val="FFFFFF"/>
+            <a:pPr algn="ctr"/>
+            <a:r>
+              <a:rPr sz="2800" b="1" i="0">
+                <a:solidFill>
+                  <a:srgbClr val="A1A1AA"/>
                 </a:solidFill>
               </a:rPr>
-              <a:t>▸  Use P95 or P99 under realistic concurrency — not average</a:t>
+              <a:t>academy.kspl.tech</a:t>
             </a:r>
           </a:p>
         </p:txBody>
@@ -7323,8 +5185,8 @@
         </p:nvSpPr>
         <p:spPr>
           <a:xfrm>
-            <a:off x="777240" y="1847088"/>
-            <a:ext cx="10607040" cy="548640"/>
+            <a:off x="731520" y="6263640"/>
+            <a:ext cx="10698480" cy="365760"/>
           </a:xfrm>
           <a:prstGeom prst="rect">
             <a:avLst/>
@@ -7337,112 +5199,14 @@
           </a:bodyPr>
           <a:lstStyle/>
           <a:p>
-            <a:r>
-              <a:rPr sz="2000">
-                <a:solidFill>
-                  <a:srgbClr val="FFFFFF"/>
+            <a:pPr algn="ctr"/>
+            <a:r>
+              <a:rPr sz="1000" b="0" i="0">
+                <a:solidFill>
+                  <a:srgbClr val="A1A1AA"/>
                 </a:solidFill>
               </a:rPr>
-              <a:t>▸  2s average / 12s P99 can be worse than 3s average / 5s P99</a:t>
-            </a:r>
-          </a:p>
-        </p:txBody>
-      </p:sp>
-      <p:sp>
-        <p:nvSpPr>
-          <p:cNvPr id="6" name="TextBox 5"/>
-          <p:cNvSpPr txBox="1"/>
-          <p:nvPr/>
-        </p:nvSpPr>
-        <p:spPr>
-          <a:xfrm>
-            <a:off x="777240" y="2414016"/>
-            <a:ext cx="10607040" cy="548640"/>
-          </a:xfrm>
-          <a:prstGeom prst="rect">
-            <a:avLst/>
-          </a:prstGeom>
-          <a:noFill/>
-        </p:spPr>
-        <p:txBody>
-          <a:bodyPr wrap="square">
-            <a:spAutoFit/>
-          </a:bodyPr>
-          <a:lstStyle/>
-          <a:p>
-            <a:r>
-              <a:rPr sz="2000">
-                <a:solidFill>
-                  <a:srgbClr val="FFFFFF"/>
-                </a:solidFill>
-              </a:rPr>
-              <a:t>▸  Customer-facing features: P99 sets the worst experience, not the average</a:t>
-            </a:r>
-          </a:p>
-        </p:txBody>
-      </p:sp>
-      <p:sp>
-        <p:nvSpPr>
-          <p:cNvPr id="7" name="TextBox 6"/>
-          <p:cNvSpPr txBox="1"/>
-          <p:nvPr/>
-        </p:nvSpPr>
-        <p:spPr>
-          <a:xfrm>
-            <a:off x="777240" y="2980944"/>
-            <a:ext cx="10607040" cy="548640"/>
-          </a:xfrm>
-          <a:prstGeom prst="rect">
-            <a:avLst/>
-          </a:prstGeom>
-          <a:noFill/>
-        </p:spPr>
-        <p:txBody>
-          <a:bodyPr wrap="square">
-            <a:spAutoFit/>
-          </a:bodyPr>
-          <a:lstStyle/>
-          <a:p>
-            <a:r>
-              <a:rPr sz="2000">
-                <a:solidFill>
-                  <a:srgbClr val="FFFFFF"/>
-                </a:solidFill>
-              </a:rPr>
-              <a:t>▸  Latency is workload-specific — cannot be read from a spec sheet</a:t>
-            </a:r>
-          </a:p>
-        </p:txBody>
-      </p:sp>
-      <p:sp>
-        <p:nvSpPr>
-          <p:cNvPr id="8" name="TextBox 7"/>
-          <p:cNvSpPr txBox="1"/>
-          <p:nvPr/>
-        </p:nvSpPr>
-        <p:spPr>
-          <a:xfrm>
-            <a:off x="777240" y="3547872"/>
-            <a:ext cx="10607040" cy="548640"/>
-          </a:xfrm>
-          <a:prstGeom prst="rect">
-            <a:avLst/>
-          </a:prstGeom>
-          <a:noFill/>
-        </p:spPr>
-        <p:txBody>
-          <a:bodyPr wrap="square">
-            <a:spAutoFit/>
-          </a:bodyPr>
-          <a:lstStyle/>
-          <a:p>
-            <a:r>
-              <a:rPr sz="2000">
-                <a:solidFill>
-                  <a:srgbClr val="FFFFFF"/>
-                </a:solidFill>
-              </a:rPr>
-              <a:t>▸  Batch / async workloads: latency is last priority — cost dominates</a:t>
+              <a:t>academy.kspl.tech | Koenig AI Academy</a:t>
             </a:r>
           </a:p>
         </p:txBody>
